--- a/public/videos/repositories/gemecard-portal/gemecard-portal-tech-preview.pptx
+++ b/public/videos/repositories/gemecard-portal/gemecard-portal-tech-preview.pptx
@@ -134,7 +134,7 @@
           <p:cNvPr id="2" name="タイトル 1">
             <a:extLst>
               <a:ext uri="{FF2B5EF4-FFF2-40B4-BE49-F238E27FC236}">
-                <a16:creationId xmlns:a16="http://schemas.microsoft.com/office/drawing/2014/main" id="{AADB55E4-F5C1-315B-D427-826219BB490D}"/>
+                <a16:creationId xmlns:a16="http://schemas.microsoft.com/office/drawing/2014/main" id="{1E63B1C1-8905-ECF7-BD98-54E4C9D0E545}"/>
               </a:ext>
             </a:extLst>
           </p:cNvPr>
@@ -171,7 +171,7 @@
           <p:cNvPr id="3" name="字幕 2">
             <a:extLst>
               <a:ext uri="{FF2B5EF4-FFF2-40B4-BE49-F238E27FC236}">
-                <a16:creationId xmlns:a16="http://schemas.microsoft.com/office/drawing/2014/main" id="{56587181-B96B-7EBA-55AA-0159F0E94302}"/>
+                <a16:creationId xmlns:a16="http://schemas.microsoft.com/office/drawing/2014/main" id="{BD8C71EF-6C37-4FFA-FB05-A5A63D59FB84}"/>
               </a:ext>
             </a:extLst>
           </p:cNvPr>
@@ -241,7 +241,7 @@
           <p:cNvPr id="4" name="日付プレースホルダー 3">
             <a:extLst>
               <a:ext uri="{FF2B5EF4-FFF2-40B4-BE49-F238E27FC236}">
-                <a16:creationId xmlns:a16="http://schemas.microsoft.com/office/drawing/2014/main" id="{F288CB95-2622-7605-FF5B-518EBD4383CC}"/>
+                <a16:creationId xmlns:a16="http://schemas.microsoft.com/office/drawing/2014/main" id="{C1BB704E-457E-65CD-36B9-F66EADC8AE90}"/>
               </a:ext>
             </a:extLst>
           </p:cNvPr>
@@ -257,7 +257,7 @@
           <a:bodyPr/>
           <a:lstStyle/>
           <a:p>
-            <a:fld id="{6336A5B6-2F89-4EAA-B501-F554C52F59AC}" type="datetimeFigureOut">
+            <a:fld id="{B4538FFC-6BF6-4B0F-8014-60B4912D1308}" type="datetimeFigureOut">
               <a:rPr kumimoji="1" lang="ja-JP" altLang="en-US" smtClean="0"/>
               <a:t>2026/7/30</a:t>
             </a:fld>
@@ -270,7 +270,7 @@
           <p:cNvPr id="5" name="フッター プレースホルダー 4">
             <a:extLst>
               <a:ext uri="{FF2B5EF4-FFF2-40B4-BE49-F238E27FC236}">
-                <a16:creationId xmlns:a16="http://schemas.microsoft.com/office/drawing/2014/main" id="{30EC3742-FFAF-AD54-EC7D-E25ED72A1623}"/>
+                <a16:creationId xmlns:a16="http://schemas.microsoft.com/office/drawing/2014/main" id="{8B974DCE-5C42-BF09-332B-E118B233FB54}"/>
               </a:ext>
             </a:extLst>
           </p:cNvPr>
@@ -295,7 +295,7 @@
           <p:cNvPr id="6" name="スライド番号プレースホルダー 5">
             <a:extLst>
               <a:ext uri="{FF2B5EF4-FFF2-40B4-BE49-F238E27FC236}">
-                <a16:creationId xmlns:a16="http://schemas.microsoft.com/office/drawing/2014/main" id="{DE945BFD-481A-4DDA-D0B6-9C439FA0A51C}"/>
+                <a16:creationId xmlns:a16="http://schemas.microsoft.com/office/drawing/2014/main" id="{AE750BFF-A739-8410-3715-F398B45372D7}"/>
               </a:ext>
             </a:extLst>
           </p:cNvPr>
@@ -311,7 +311,7 @@
           <a:bodyPr/>
           <a:lstStyle/>
           <a:p>
-            <a:fld id="{118B8FC8-DC37-4BC4-9B7B-CFD53EE29822}" type="slidenum">
+            <a:fld id="{2B4D0C7B-E581-45B6-BF77-AB7BC2B8D965}" type="slidenum">
               <a:rPr kumimoji="1" lang="ja-JP" altLang="en-US" smtClean="0"/>
               <a:t>‹#›</a:t>
             </a:fld>
@@ -322,7 +322,7 @@
     </p:spTree>
     <p:extLst>
       <p:ext uri="{BB962C8B-B14F-4D97-AF65-F5344CB8AC3E}">
-        <p14:creationId xmlns:p14="http://schemas.microsoft.com/office/powerpoint/2010/main" val="3911610552"/>
+        <p14:creationId xmlns:p14="http://schemas.microsoft.com/office/powerpoint/2010/main" val="3186722026"/>
       </p:ext>
     </p:extLst>
   </p:cSld>
@@ -354,7 +354,7 @@
           <p:cNvPr id="2" name="タイトル 1">
             <a:extLst>
               <a:ext uri="{FF2B5EF4-FFF2-40B4-BE49-F238E27FC236}">
-                <a16:creationId xmlns:a16="http://schemas.microsoft.com/office/drawing/2014/main" id="{8BF3B401-E649-AD8A-1461-BDF60BFEC299}"/>
+                <a16:creationId xmlns:a16="http://schemas.microsoft.com/office/drawing/2014/main" id="{F22AECCF-4AAF-D2CF-5A43-A156F99D4B1E}"/>
               </a:ext>
             </a:extLst>
           </p:cNvPr>
@@ -382,7 +382,7 @@
           <p:cNvPr id="3" name="縦書きテキスト プレースホルダー 2">
             <a:extLst>
               <a:ext uri="{FF2B5EF4-FFF2-40B4-BE49-F238E27FC236}">
-                <a16:creationId xmlns:a16="http://schemas.microsoft.com/office/drawing/2014/main" id="{1CD11E15-BA3B-BF53-6A3B-667F148392FD}"/>
+                <a16:creationId xmlns:a16="http://schemas.microsoft.com/office/drawing/2014/main" id="{97CC5111-7EA3-4BD7-2287-945E76D4D114}"/>
               </a:ext>
             </a:extLst>
           </p:cNvPr>
@@ -471,7 +471,7 @@
           <p:cNvPr id="4" name="日付プレースホルダー 3">
             <a:extLst>
               <a:ext uri="{FF2B5EF4-FFF2-40B4-BE49-F238E27FC236}">
-                <a16:creationId xmlns:a16="http://schemas.microsoft.com/office/drawing/2014/main" id="{8727F1AF-7416-D26D-560B-B8B70B87919E}"/>
+                <a16:creationId xmlns:a16="http://schemas.microsoft.com/office/drawing/2014/main" id="{581F2913-0268-0A71-4044-7834DBB004F5}"/>
               </a:ext>
             </a:extLst>
           </p:cNvPr>
@@ -487,7 +487,7 @@
           <a:bodyPr/>
           <a:lstStyle/>
           <a:p>
-            <a:fld id="{6336A5B6-2F89-4EAA-B501-F554C52F59AC}" type="datetimeFigureOut">
+            <a:fld id="{B4538FFC-6BF6-4B0F-8014-60B4912D1308}" type="datetimeFigureOut">
               <a:rPr kumimoji="1" lang="ja-JP" altLang="en-US" smtClean="0"/>
               <a:t>2026/7/30</a:t>
             </a:fld>
@@ -500,7 +500,7 @@
           <p:cNvPr id="5" name="フッター プレースホルダー 4">
             <a:extLst>
               <a:ext uri="{FF2B5EF4-FFF2-40B4-BE49-F238E27FC236}">
-                <a16:creationId xmlns:a16="http://schemas.microsoft.com/office/drawing/2014/main" id="{87F0A728-0F2E-04A6-9058-043D9BFF83D3}"/>
+                <a16:creationId xmlns:a16="http://schemas.microsoft.com/office/drawing/2014/main" id="{13D348CF-4660-D2F8-6C28-4B107F2EF8E8}"/>
               </a:ext>
             </a:extLst>
           </p:cNvPr>
@@ -525,7 +525,7 @@
           <p:cNvPr id="6" name="スライド番号プレースホルダー 5">
             <a:extLst>
               <a:ext uri="{FF2B5EF4-FFF2-40B4-BE49-F238E27FC236}">
-                <a16:creationId xmlns:a16="http://schemas.microsoft.com/office/drawing/2014/main" id="{CB0BB12E-7C66-2295-47B1-9AE280CF343D}"/>
+                <a16:creationId xmlns:a16="http://schemas.microsoft.com/office/drawing/2014/main" id="{CD50DFA4-5616-3944-4ADA-CBAD5D12F2A4}"/>
               </a:ext>
             </a:extLst>
           </p:cNvPr>
@@ -541,7 +541,7 @@
           <a:bodyPr/>
           <a:lstStyle/>
           <a:p>
-            <a:fld id="{118B8FC8-DC37-4BC4-9B7B-CFD53EE29822}" type="slidenum">
+            <a:fld id="{2B4D0C7B-E581-45B6-BF77-AB7BC2B8D965}" type="slidenum">
               <a:rPr kumimoji="1" lang="ja-JP" altLang="en-US" smtClean="0"/>
               <a:t>‹#›</a:t>
             </a:fld>
@@ -552,7 +552,7 @@
     </p:spTree>
     <p:extLst>
       <p:ext uri="{BB962C8B-B14F-4D97-AF65-F5344CB8AC3E}">
-        <p14:creationId xmlns:p14="http://schemas.microsoft.com/office/powerpoint/2010/main" val="2830179960"/>
+        <p14:creationId xmlns:p14="http://schemas.microsoft.com/office/powerpoint/2010/main" val="759178870"/>
       </p:ext>
     </p:extLst>
   </p:cSld>
@@ -584,7 +584,7 @@
           <p:cNvPr id="2" name="縦書きタイトル 1">
             <a:extLst>
               <a:ext uri="{FF2B5EF4-FFF2-40B4-BE49-F238E27FC236}">
-                <a16:creationId xmlns:a16="http://schemas.microsoft.com/office/drawing/2014/main" id="{8E7C2513-325C-E00E-DB63-8F27A05EFDA1}"/>
+                <a16:creationId xmlns:a16="http://schemas.microsoft.com/office/drawing/2014/main" id="{90D9B788-C261-9A6C-FD9B-68711133A03C}"/>
               </a:ext>
             </a:extLst>
           </p:cNvPr>
@@ -617,7 +617,7 @@
           <p:cNvPr id="3" name="縦書きテキスト プレースホルダー 2">
             <a:extLst>
               <a:ext uri="{FF2B5EF4-FFF2-40B4-BE49-F238E27FC236}">
-                <a16:creationId xmlns:a16="http://schemas.microsoft.com/office/drawing/2014/main" id="{F38ADA49-CA50-77EA-3EA7-B6780AECEDE6}"/>
+                <a16:creationId xmlns:a16="http://schemas.microsoft.com/office/drawing/2014/main" id="{A36D2D27-1D00-9FA8-46CB-C35996F751BE}"/>
               </a:ext>
             </a:extLst>
           </p:cNvPr>
@@ -711,7 +711,7 @@
           <p:cNvPr id="4" name="日付プレースホルダー 3">
             <a:extLst>
               <a:ext uri="{FF2B5EF4-FFF2-40B4-BE49-F238E27FC236}">
-                <a16:creationId xmlns:a16="http://schemas.microsoft.com/office/drawing/2014/main" id="{E62DC406-056F-090A-68F6-E5D33CA63544}"/>
+                <a16:creationId xmlns:a16="http://schemas.microsoft.com/office/drawing/2014/main" id="{7C455226-B362-A3ED-E2BD-7C095808B29D}"/>
               </a:ext>
             </a:extLst>
           </p:cNvPr>
@@ -727,7 +727,7 @@
           <a:bodyPr/>
           <a:lstStyle/>
           <a:p>
-            <a:fld id="{6336A5B6-2F89-4EAA-B501-F554C52F59AC}" type="datetimeFigureOut">
+            <a:fld id="{B4538FFC-6BF6-4B0F-8014-60B4912D1308}" type="datetimeFigureOut">
               <a:rPr kumimoji="1" lang="ja-JP" altLang="en-US" smtClean="0"/>
               <a:t>2026/7/30</a:t>
             </a:fld>
@@ -740,7 +740,7 @@
           <p:cNvPr id="5" name="フッター プレースホルダー 4">
             <a:extLst>
               <a:ext uri="{FF2B5EF4-FFF2-40B4-BE49-F238E27FC236}">
-                <a16:creationId xmlns:a16="http://schemas.microsoft.com/office/drawing/2014/main" id="{70221322-B2D9-EA1E-BD38-B3485B4901B8}"/>
+                <a16:creationId xmlns:a16="http://schemas.microsoft.com/office/drawing/2014/main" id="{E013A78C-9163-0191-016F-41B1BB6AC626}"/>
               </a:ext>
             </a:extLst>
           </p:cNvPr>
@@ -765,7 +765,7 @@
           <p:cNvPr id="6" name="スライド番号プレースホルダー 5">
             <a:extLst>
               <a:ext uri="{FF2B5EF4-FFF2-40B4-BE49-F238E27FC236}">
-                <a16:creationId xmlns:a16="http://schemas.microsoft.com/office/drawing/2014/main" id="{2A65434D-5EC9-603C-7401-BD0845332CE3}"/>
+                <a16:creationId xmlns:a16="http://schemas.microsoft.com/office/drawing/2014/main" id="{B0D24602-01A3-5653-7F47-AA3159ECA4EB}"/>
               </a:ext>
             </a:extLst>
           </p:cNvPr>
@@ -781,7 +781,7 @@
           <a:bodyPr/>
           <a:lstStyle/>
           <a:p>
-            <a:fld id="{118B8FC8-DC37-4BC4-9B7B-CFD53EE29822}" type="slidenum">
+            <a:fld id="{2B4D0C7B-E581-45B6-BF77-AB7BC2B8D965}" type="slidenum">
               <a:rPr kumimoji="1" lang="ja-JP" altLang="en-US" smtClean="0"/>
               <a:t>‹#›</a:t>
             </a:fld>
@@ -792,7 +792,7 @@
     </p:spTree>
     <p:extLst>
       <p:ext uri="{BB962C8B-B14F-4D97-AF65-F5344CB8AC3E}">
-        <p14:creationId xmlns:p14="http://schemas.microsoft.com/office/powerpoint/2010/main" val="2077858289"/>
+        <p14:creationId xmlns:p14="http://schemas.microsoft.com/office/powerpoint/2010/main" val="2132255878"/>
       </p:ext>
     </p:extLst>
   </p:cSld>
@@ -824,7 +824,7 @@
           <p:cNvPr id="2" name="タイトル 1">
             <a:extLst>
               <a:ext uri="{FF2B5EF4-FFF2-40B4-BE49-F238E27FC236}">
-                <a16:creationId xmlns:a16="http://schemas.microsoft.com/office/drawing/2014/main" id="{5C78EDA3-3813-5789-1556-AC01AFE7409F}"/>
+                <a16:creationId xmlns:a16="http://schemas.microsoft.com/office/drawing/2014/main" id="{B4516FDC-4007-34D9-1D7F-3BE0CBA3C074}"/>
               </a:ext>
             </a:extLst>
           </p:cNvPr>
@@ -852,7 +852,7 @@
           <p:cNvPr id="3" name="コンテンツ プレースホルダー 2">
             <a:extLst>
               <a:ext uri="{FF2B5EF4-FFF2-40B4-BE49-F238E27FC236}">
-                <a16:creationId xmlns:a16="http://schemas.microsoft.com/office/drawing/2014/main" id="{3892FF61-180C-E5D9-F212-F1CDD23E49B1}"/>
+                <a16:creationId xmlns:a16="http://schemas.microsoft.com/office/drawing/2014/main" id="{2B80F920-8ECF-4F95-8DCA-3590811139B1}"/>
               </a:ext>
             </a:extLst>
           </p:cNvPr>
@@ -941,7 +941,7 @@
           <p:cNvPr id="4" name="日付プレースホルダー 3">
             <a:extLst>
               <a:ext uri="{FF2B5EF4-FFF2-40B4-BE49-F238E27FC236}">
-                <a16:creationId xmlns:a16="http://schemas.microsoft.com/office/drawing/2014/main" id="{D134AB4F-2439-8928-87CC-82C2B36E2482}"/>
+                <a16:creationId xmlns:a16="http://schemas.microsoft.com/office/drawing/2014/main" id="{7835294D-6799-C5C0-CB62-FAC0E8AE65AB}"/>
               </a:ext>
             </a:extLst>
           </p:cNvPr>
@@ -957,7 +957,7 @@
           <a:bodyPr/>
           <a:lstStyle/>
           <a:p>
-            <a:fld id="{6336A5B6-2F89-4EAA-B501-F554C52F59AC}" type="datetimeFigureOut">
+            <a:fld id="{B4538FFC-6BF6-4B0F-8014-60B4912D1308}" type="datetimeFigureOut">
               <a:rPr kumimoji="1" lang="ja-JP" altLang="en-US" smtClean="0"/>
               <a:t>2026/7/30</a:t>
             </a:fld>
@@ -970,7 +970,7 @@
           <p:cNvPr id="5" name="フッター プレースホルダー 4">
             <a:extLst>
               <a:ext uri="{FF2B5EF4-FFF2-40B4-BE49-F238E27FC236}">
-                <a16:creationId xmlns:a16="http://schemas.microsoft.com/office/drawing/2014/main" id="{D1E48D24-4E2F-4E0C-6686-F38C7DDF1BC9}"/>
+                <a16:creationId xmlns:a16="http://schemas.microsoft.com/office/drawing/2014/main" id="{D48EB565-21F5-E398-8351-83B8BCB380F4}"/>
               </a:ext>
             </a:extLst>
           </p:cNvPr>
@@ -995,7 +995,7 @@
           <p:cNvPr id="6" name="スライド番号プレースホルダー 5">
             <a:extLst>
               <a:ext uri="{FF2B5EF4-FFF2-40B4-BE49-F238E27FC236}">
-                <a16:creationId xmlns:a16="http://schemas.microsoft.com/office/drawing/2014/main" id="{D7D22F08-5BB2-7E59-FEFE-A4619A37FA18}"/>
+                <a16:creationId xmlns:a16="http://schemas.microsoft.com/office/drawing/2014/main" id="{3AFCEC97-4649-0933-1A66-CB3915FEB7B4}"/>
               </a:ext>
             </a:extLst>
           </p:cNvPr>
@@ -1011,7 +1011,7 @@
           <a:bodyPr/>
           <a:lstStyle/>
           <a:p>
-            <a:fld id="{118B8FC8-DC37-4BC4-9B7B-CFD53EE29822}" type="slidenum">
+            <a:fld id="{2B4D0C7B-E581-45B6-BF77-AB7BC2B8D965}" type="slidenum">
               <a:rPr kumimoji="1" lang="ja-JP" altLang="en-US" smtClean="0"/>
               <a:t>‹#›</a:t>
             </a:fld>
@@ -1022,7 +1022,7 @@
     </p:spTree>
     <p:extLst>
       <p:ext uri="{BB962C8B-B14F-4D97-AF65-F5344CB8AC3E}">
-        <p14:creationId xmlns:p14="http://schemas.microsoft.com/office/powerpoint/2010/main" val="2385742155"/>
+        <p14:creationId xmlns:p14="http://schemas.microsoft.com/office/powerpoint/2010/main" val="1106066219"/>
       </p:ext>
     </p:extLst>
   </p:cSld>
@@ -1054,7 +1054,7 @@
           <p:cNvPr id="2" name="タイトル 1">
             <a:extLst>
               <a:ext uri="{FF2B5EF4-FFF2-40B4-BE49-F238E27FC236}">
-                <a16:creationId xmlns:a16="http://schemas.microsoft.com/office/drawing/2014/main" id="{C54E28B7-F1EB-87DF-A5C4-062D93154EE9}"/>
+                <a16:creationId xmlns:a16="http://schemas.microsoft.com/office/drawing/2014/main" id="{0BEC3E13-D37C-CEEC-BF1A-AABF0AFCC929}"/>
               </a:ext>
             </a:extLst>
           </p:cNvPr>
@@ -1091,7 +1091,7 @@
           <p:cNvPr id="3" name="テキスト プレースホルダー 2">
             <a:extLst>
               <a:ext uri="{FF2B5EF4-FFF2-40B4-BE49-F238E27FC236}">
-                <a16:creationId xmlns:a16="http://schemas.microsoft.com/office/drawing/2014/main" id="{167CE0B6-0B4E-C04A-3288-83020B9E6FAB}"/>
+                <a16:creationId xmlns:a16="http://schemas.microsoft.com/office/drawing/2014/main" id="{D80A94F1-58DA-926D-AC3A-D6A402F109DE}"/>
               </a:ext>
             </a:extLst>
           </p:cNvPr>
@@ -1216,7 +1216,7 @@
           <p:cNvPr id="4" name="日付プレースホルダー 3">
             <a:extLst>
               <a:ext uri="{FF2B5EF4-FFF2-40B4-BE49-F238E27FC236}">
-                <a16:creationId xmlns:a16="http://schemas.microsoft.com/office/drawing/2014/main" id="{61226FA2-9E21-2FDE-50D3-D97A05FF6C74}"/>
+                <a16:creationId xmlns:a16="http://schemas.microsoft.com/office/drawing/2014/main" id="{55AA3CBB-03CE-E66B-EDFC-4380A95DB8E8}"/>
               </a:ext>
             </a:extLst>
           </p:cNvPr>
@@ -1232,7 +1232,7 @@
           <a:bodyPr/>
           <a:lstStyle/>
           <a:p>
-            <a:fld id="{6336A5B6-2F89-4EAA-B501-F554C52F59AC}" type="datetimeFigureOut">
+            <a:fld id="{B4538FFC-6BF6-4B0F-8014-60B4912D1308}" type="datetimeFigureOut">
               <a:rPr kumimoji="1" lang="ja-JP" altLang="en-US" smtClean="0"/>
               <a:t>2026/7/30</a:t>
             </a:fld>
@@ -1245,7 +1245,7 @@
           <p:cNvPr id="5" name="フッター プレースホルダー 4">
             <a:extLst>
               <a:ext uri="{FF2B5EF4-FFF2-40B4-BE49-F238E27FC236}">
-                <a16:creationId xmlns:a16="http://schemas.microsoft.com/office/drawing/2014/main" id="{1F105B1C-3510-BA8F-63F7-6C1AB49913B7}"/>
+                <a16:creationId xmlns:a16="http://schemas.microsoft.com/office/drawing/2014/main" id="{2FA34963-F113-E59F-A65A-8208F770F890}"/>
               </a:ext>
             </a:extLst>
           </p:cNvPr>
@@ -1270,7 +1270,7 @@
           <p:cNvPr id="6" name="スライド番号プレースホルダー 5">
             <a:extLst>
               <a:ext uri="{FF2B5EF4-FFF2-40B4-BE49-F238E27FC236}">
-                <a16:creationId xmlns:a16="http://schemas.microsoft.com/office/drawing/2014/main" id="{A1D52989-F63D-558C-A59B-BE46E64DBE5E}"/>
+                <a16:creationId xmlns:a16="http://schemas.microsoft.com/office/drawing/2014/main" id="{84C53029-F941-417D-E33F-707B67FD4A7F}"/>
               </a:ext>
             </a:extLst>
           </p:cNvPr>
@@ -1286,7 +1286,7 @@
           <a:bodyPr/>
           <a:lstStyle/>
           <a:p>
-            <a:fld id="{118B8FC8-DC37-4BC4-9B7B-CFD53EE29822}" type="slidenum">
+            <a:fld id="{2B4D0C7B-E581-45B6-BF77-AB7BC2B8D965}" type="slidenum">
               <a:rPr kumimoji="1" lang="ja-JP" altLang="en-US" smtClean="0"/>
               <a:t>‹#›</a:t>
             </a:fld>
@@ -1297,7 +1297,7 @@
     </p:spTree>
     <p:extLst>
       <p:ext uri="{BB962C8B-B14F-4D97-AF65-F5344CB8AC3E}">
-        <p14:creationId xmlns:p14="http://schemas.microsoft.com/office/powerpoint/2010/main" val="1219673959"/>
+        <p14:creationId xmlns:p14="http://schemas.microsoft.com/office/powerpoint/2010/main" val="3876713034"/>
       </p:ext>
     </p:extLst>
   </p:cSld>
@@ -1329,7 +1329,7 @@
           <p:cNvPr id="2" name="タイトル 1">
             <a:extLst>
               <a:ext uri="{FF2B5EF4-FFF2-40B4-BE49-F238E27FC236}">
-                <a16:creationId xmlns:a16="http://schemas.microsoft.com/office/drawing/2014/main" id="{EF6D0A80-B047-8526-157B-3ACFA8862512}"/>
+                <a16:creationId xmlns:a16="http://schemas.microsoft.com/office/drawing/2014/main" id="{73383546-7400-C8C7-C206-AF7107E84F44}"/>
               </a:ext>
             </a:extLst>
           </p:cNvPr>
@@ -1357,7 +1357,7 @@
           <p:cNvPr id="3" name="コンテンツ プレースホルダー 2">
             <a:extLst>
               <a:ext uri="{FF2B5EF4-FFF2-40B4-BE49-F238E27FC236}">
-                <a16:creationId xmlns:a16="http://schemas.microsoft.com/office/drawing/2014/main" id="{44E589A6-B1E6-9E7F-15FE-77D9D22121C1}"/>
+                <a16:creationId xmlns:a16="http://schemas.microsoft.com/office/drawing/2014/main" id="{73A5A5EB-B50D-71BA-16A9-5DC2D8334869}"/>
               </a:ext>
             </a:extLst>
           </p:cNvPr>
@@ -1451,7 +1451,7 @@
           <p:cNvPr id="4" name="コンテンツ プレースホルダー 3">
             <a:extLst>
               <a:ext uri="{FF2B5EF4-FFF2-40B4-BE49-F238E27FC236}">
-                <a16:creationId xmlns:a16="http://schemas.microsoft.com/office/drawing/2014/main" id="{8EA0BF86-4349-6577-96BF-6EF3F2862891}"/>
+                <a16:creationId xmlns:a16="http://schemas.microsoft.com/office/drawing/2014/main" id="{D0487B3B-5264-9596-94B7-9312522E4EF6}"/>
               </a:ext>
             </a:extLst>
           </p:cNvPr>
@@ -1545,7 +1545,7 @@
           <p:cNvPr id="5" name="日付プレースホルダー 4">
             <a:extLst>
               <a:ext uri="{FF2B5EF4-FFF2-40B4-BE49-F238E27FC236}">
-                <a16:creationId xmlns:a16="http://schemas.microsoft.com/office/drawing/2014/main" id="{8C74BE57-1601-D29E-2F8B-39630F7187D0}"/>
+                <a16:creationId xmlns:a16="http://schemas.microsoft.com/office/drawing/2014/main" id="{E7582563-71BB-A99B-CD6B-4CD9509923E7}"/>
               </a:ext>
             </a:extLst>
           </p:cNvPr>
@@ -1561,7 +1561,7 @@
           <a:bodyPr/>
           <a:lstStyle/>
           <a:p>
-            <a:fld id="{6336A5B6-2F89-4EAA-B501-F554C52F59AC}" type="datetimeFigureOut">
+            <a:fld id="{B4538FFC-6BF6-4B0F-8014-60B4912D1308}" type="datetimeFigureOut">
               <a:rPr kumimoji="1" lang="ja-JP" altLang="en-US" smtClean="0"/>
               <a:t>2026/7/30</a:t>
             </a:fld>
@@ -1574,7 +1574,7 @@
           <p:cNvPr id="6" name="フッター プレースホルダー 5">
             <a:extLst>
               <a:ext uri="{FF2B5EF4-FFF2-40B4-BE49-F238E27FC236}">
-                <a16:creationId xmlns:a16="http://schemas.microsoft.com/office/drawing/2014/main" id="{4A9685E1-E915-6ED1-BBF9-BCEBB238566C}"/>
+                <a16:creationId xmlns:a16="http://schemas.microsoft.com/office/drawing/2014/main" id="{1E014A21-0AF9-9CE0-3AF6-B8B0240299E0}"/>
               </a:ext>
             </a:extLst>
           </p:cNvPr>
@@ -1599,7 +1599,7 @@
           <p:cNvPr id="7" name="スライド番号プレースホルダー 6">
             <a:extLst>
               <a:ext uri="{FF2B5EF4-FFF2-40B4-BE49-F238E27FC236}">
-                <a16:creationId xmlns:a16="http://schemas.microsoft.com/office/drawing/2014/main" id="{8DCCAA27-26FE-312B-B5BD-623125D742EF}"/>
+                <a16:creationId xmlns:a16="http://schemas.microsoft.com/office/drawing/2014/main" id="{B519EB7D-56C3-A7E2-2A25-DA2B8CAC575A}"/>
               </a:ext>
             </a:extLst>
           </p:cNvPr>
@@ -1615,7 +1615,7 @@
           <a:bodyPr/>
           <a:lstStyle/>
           <a:p>
-            <a:fld id="{118B8FC8-DC37-4BC4-9B7B-CFD53EE29822}" type="slidenum">
+            <a:fld id="{2B4D0C7B-E581-45B6-BF77-AB7BC2B8D965}" type="slidenum">
               <a:rPr kumimoji="1" lang="ja-JP" altLang="en-US" smtClean="0"/>
               <a:t>‹#›</a:t>
             </a:fld>
@@ -1626,7 +1626,7 @@
     </p:spTree>
     <p:extLst>
       <p:ext uri="{BB962C8B-B14F-4D97-AF65-F5344CB8AC3E}">
-        <p14:creationId xmlns:p14="http://schemas.microsoft.com/office/powerpoint/2010/main" val="3660661145"/>
+        <p14:creationId xmlns:p14="http://schemas.microsoft.com/office/powerpoint/2010/main" val="1072915277"/>
       </p:ext>
     </p:extLst>
   </p:cSld>
@@ -1658,7 +1658,7 @@
           <p:cNvPr id="2" name="タイトル 1">
             <a:extLst>
               <a:ext uri="{FF2B5EF4-FFF2-40B4-BE49-F238E27FC236}">
-                <a16:creationId xmlns:a16="http://schemas.microsoft.com/office/drawing/2014/main" id="{0611AC8D-3A8D-ED15-52C9-E56124E22691}"/>
+                <a16:creationId xmlns:a16="http://schemas.microsoft.com/office/drawing/2014/main" id="{563AEDAE-70A2-EDA6-D8D8-3AC925988512}"/>
               </a:ext>
             </a:extLst>
           </p:cNvPr>
@@ -1691,7 +1691,7 @@
           <p:cNvPr id="3" name="テキスト プレースホルダー 2">
             <a:extLst>
               <a:ext uri="{FF2B5EF4-FFF2-40B4-BE49-F238E27FC236}">
-                <a16:creationId xmlns:a16="http://schemas.microsoft.com/office/drawing/2014/main" id="{C4A18C05-70B2-10DE-363D-CA2BE623F6B6}"/>
+                <a16:creationId xmlns:a16="http://schemas.microsoft.com/office/drawing/2014/main" id="{30C08DDC-0750-903E-BF84-945F94ECF005}"/>
               </a:ext>
             </a:extLst>
           </p:cNvPr>
@@ -1762,7 +1762,7 @@
           <p:cNvPr id="4" name="コンテンツ プレースホルダー 3">
             <a:extLst>
               <a:ext uri="{FF2B5EF4-FFF2-40B4-BE49-F238E27FC236}">
-                <a16:creationId xmlns:a16="http://schemas.microsoft.com/office/drawing/2014/main" id="{7CC0D00B-EF43-CC24-0C94-BC83291B2F74}"/>
+                <a16:creationId xmlns:a16="http://schemas.microsoft.com/office/drawing/2014/main" id="{5B1AB897-0B13-B910-AD09-86431AC634EE}"/>
               </a:ext>
             </a:extLst>
           </p:cNvPr>
@@ -1856,7 +1856,7 @@
           <p:cNvPr id="5" name="テキスト プレースホルダー 4">
             <a:extLst>
               <a:ext uri="{FF2B5EF4-FFF2-40B4-BE49-F238E27FC236}">
-                <a16:creationId xmlns:a16="http://schemas.microsoft.com/office/drawing/2014/main" id="{3EA5FB43-8571-E932-F36B-66FDDF319D91}"/>
+                <a16:creationId xmlns:a16="http://schemas.microsoft.com/office/drawing/2014/main" id="{3D099D4F-EAB5-92F9-0988-7420EB9B2B34}"/>
               </a:ext>
             </a:extLst>
           </p:cNvPr>
@@ -1927,7 +1927,7 @@
           <p:cNvPr id="6" name="コンテンツ プレースホルダー 5">
             <a:extLst>
               <a:ext uri="{FF2B5EF4-FFF2-40B4-BE49-F238E27FC236}">
-                <a16:creationId xmlns:a16="http://schemas.microsoft.com/office/drawing/2014/main" id="{3E726F57-162D-2E30-C9A5-1CE3F09495B6}"/>
+                <a16:creationId xmlns:a16="http://schemas.microsoft.com/office/drawing/2014/main" id="{8BE81D03-F953-B8E1-C03E-CFBAB7F8F0BA}"/>
               </a:ext>
             </a:extLst>
           </p:cNvPr>
@@ -2021,7 +2021,7 @@
           <p:cNvPr id="7" name="日付プレースホルダー 6">
             <a:extLst>
               <a:ext uri="{FF2B5EF4-FFF2-40B4-BE49-F238E27FC236}">
-                <a16:creationId xmlns:a16="http://schemas.microsoft.com/office/drawing/2014/main" id="{3A337387-CD1B-3349-B9DB-09A8920CE385}"/>
+                <a16:creationId xmlns:a16="http://schemas.microsoft.com/office/drawing/2014/main" id="{1E8C35F6-ACD1-A4EF-4C16-E80BB14FE7E9}"/>
               </a:ext>
             </a:extLst>
           </p:cNvPr>
@@ -2037,7 +2037,7 @@
           <a:bodyPr/>
           <a:lstStyle/>
           <a:p>
-            <a:fld id="{6336A5B6-2F89-4EAA-B501-F554C52F59AC}" type="datetimeFigureOut">
+            <a:fld id="{B4538FFC-6BF6-4B0F-8014-60B4912D1308}" type="datetimeFigureOut">
               <a:rPr kumimoji="1" lang="ja-JP" altLang="en-US" smtClean="0"/>
               <a:t>2026/7/30</a:t>
             </a:fld>
@@ -2050,7 +2050,7 @@
           <p:cNvPr id="8" name="フッター プレースホルダー 7">
             <a:extLst>
               <a:ext uri="{FF2B5EF4-FFF2-40B4-BE49-F238E27FC236}">
-                <a16:creationId xmlns:a16="http://schemas.microsoft.com/office/drawing/2014/main" id="{A3E4B44D-292D-7930-627A-2B517756C07C}"/>
+                <a16:creationId xmlns:a16="http://schemas.microsoft.com/office/drawing/2014/main" id="{E15547C2-7E61-4931-2A4E-B48C47425599}"/>
               </a:ext>
             </a:extLst>
           </p:cNvPr>
@@ -2075,7 +2075,7 @@
           <p:cNvPr id="9" name="スライド番号プレースホルダー 8">
             <a:extLst>
               <a:ext uri="{FF2B5EF4-FFF2-40B4-BE49-F238E27FC236}">
-                <a16:creationId xmlns:a16="http://schemas.microsoft.com/office/drawing/2014/main" id="{7B242174-CDCF-A8FB-062A-4018841BD8B8}"/>
+                <a16:creationId xmlns:a16="http://schemas.microsoft.com/office/drawing/2014/main" id="{B554476F-2965-1CD2-19C6-EEAB61C8028E}"/>
               </a:ext>
             </a:extLst>
           </p:cNvPr>
@@ -2091,7 +2091,7 @@
           <a:bodyPr/>
           <a:lstStyle/>
           <a:p>
-            <a:fld id="{118B8FC8-DC37-4BC4-9B7B-CFD53EE29822}" type="slidenum">
+            <a:fld id="{2B4D0C7B-E581-45B6-BF77-AB7BC2B8D965}" type="slidenum">
               <a:rPr kumimoji="1" lang="ja-JP" altLang="en-US" smtClean="0"/>
               <a:t>‹#›</a:t>
             </a:fld>
@@ -2102,7 +2102,7 @@
     </p:spTree>
     <p:extLst>
       <p:ext uri="{BB962C8B-B14F-4D97-AF65-F5344CB8AC3E}">
-        <p14:creationId xmlns:p14="http://schemas.microsoft.com/office/powerpoint/2010/main" val="3456561555"/>
+        <p14:creationId xmlns:p14="http://schemas.microsoft.com/office/powerpoint/2010/main" val="4106168033"/>
       </p:ext>
     </p:extLst>
   </p:cSld>
@@ -2134,7 +2134,7 @@
           <p:cNvPr id="2" name="タイトル 1">
             <a:extLst>
               <a:ext uri="{FF2B5EF4-FFF2-40B4-BE49-F238E27FC236}">
-                <a16:creationId xmlns:a16="http://schemas.microsoft.com/office/drawing/2014/main" id="{DE6EED4D-91D2-AA2A-E46A-29D5C45567CB}"/>
+                <a16:creationId xmlns:a16="http://schemas.microsoft.com/office/drawing/2014/main" id="{782E8F04-5D03-0D4D-25FD-B61303B11E94}"/>
               </a:ext>
             </a:extLst>
           </p:cNvPr>
@@ -2162,7 +2162,7 @@
           <p:cNvPr id="3" name="日付プレースホルダー 2">
             <a:extLst>
               <a:ext uri="{FF2B5EF4-FFF2-40B4-BE49-F238E27FC236}">
-                <a16:creationId xmlns:a16="http://schemas.microsoft.com/office/drawing/2014/main" id="{EE5A70DF-78F8-9932-995D-651378322B90}"/>
+                <a16:creationId xmlns:a16="http://schemas.microsoft.com/office/drawing/2014/main" id="{9A884017-8A8D-6EBA-2D29-941FA1770049}"/>
               </a:ext>
             </a:extLst>
           </p:cNvPr>
@@ -2178,7 +2178,7 @@
           <a:bodyPr/>
           <a:lstStyle/>
           <a:p>
-            <a:fld id="{6336A5B6-2F89-4EAA-B501-F554C52F59AC}" type="datetimeFigureOut">
+            <a:fld id="{B4538FFC-6BF6-4B0F-8014-60B4912D1308}" type="datetimeFigureOut">
               <a:rPr kumimoji="1" lang="ja-JP" altLang="en-US" smtClean="0"/>
               <a:t>2026/7/30</a:t>
             </a:fld>
@@ -2191,7 +2191,7 @@
           <p:cNvPr id="4" name="フッター プレースホルダー 3">
             <a:extLst>
               <a:ext uri="{FF2B5EF4-FFF2-40B4-BE49-F238E27FC236}">
-                <a16:creationId xmlns:a16="http://schemas.microsoft.com/office/drawing/2014/main" id="{964FDC40-4777-6F9B-DEA7-CE57F6992F0B}"/>
+                <a16:creationId xmlns:a16="http://schemas.microsoft.com/office/drawing/2014/main" id="{DEA4CA73-EBB7-BD45-F670-0C8128C99167}"/>
               </a:ext>
             </a:extLst>
           </p:cNvPr>
@@ -2216,7 +2216,7 @@
           <p:cNvPr id="5" name="スライド番号プレースホルダー 4">
             <a:extLst>
               <a:ext uri="{FF2B5EF4-FFF2-40B4-BE49-F238E27FC236}">
-                <a16:creationId xmlns:a16="http://schemas.microsoft.com/office/drawing/2014/main" id="{E920AC97-74C4-7700-24FB-19BA90753561}"/>
+                <a16:creationId xmlns:a16="http://schemas.microsoft.com/office/drawing/2014/main" id="{6705F855-0F70-28E1-18F1-0B02A04190C2}"/>
               </a:ext>
             </a:extLst>
           </p:cNvPr>
@@ -2232,7 +2232,7 @@
           <a:bodyPr/>
           <a:lstStyle/>
           <a:p>
-            <a:fld id="{118B8FC8-DC37-4BC4-9B7B-CFD53EE29822}" type="slidenum">
+            <a:fld id="{2B4D0C7B-E581-45B6-BF77-AB7BC2B8D965}" type="slidenum">
               <a:rPr kumimoji="1" lang="ja-JP" altLang="en-US" smtClean="0"/>
               <a:t>‹#›</a:t>
             </a:fld>
@@ -2243,7 +2243,7 @@
     </p:spTree>
     <p:extLst>
       <p:ext uri="{BB962C8B-B14F-4D97-AF65-F5344CB8AC3E}">
-        <p14:creationId xmlns:p14="http://schemas.microsoft.com/office/powerpoint/2010/main" val="4039371242"/>
+        <p14:creationId xmlns:p14="http://schemas.microsoft.com/office/powerpoint/2010/main" val="926681235"/>
       </p:ext>
     </p:extLst>
   </p:cSld>
@@ -2275,7 +2275,7 @@
           <p:cNvPr id="2" name="日付プレースホルダー 1">
             <a:extLst>
               <a:ext uri="{FF2B5EF4-FFF2-40B4-BE49-F238E27FC236}">
-                <a16:creationId xmlns:a16="http://schemas.microsoft.com/office/drawing/2014/main" id="{32B042B6-BE19-03EA-8BD5-3EADCF408688}"/>
+                <a16:creationId xmlns:a16="http://schemas.microsoft.com/office/drawing/2014/main" id="{CFD6BD20-D89F-46E2-BC3E-E9889DDAFEDE}"/>
               </a:ext>
             </a:extLst>
           </p:cNvPr>
@@ -2291,7 +2291,7 @@
           <a:bodyPr/>
           <a:lstStyle/>
           <a:p>
-            <a:fld id="{6336A5B6-2F89-4EAA-B501-F554C52F59AC}" type="datetimeFigureOut">
+            <a:fld id="{B4538FFC-6BF6-4B0F-8014-60B4912D1308}" type="datetimeFigureOut">
               <a:rPr kumimoji="1" lang="ja-JP" altLang="en-US" smtClean="0"/>
               <a:t>2026/7/30</a:t>
             </a:fld>
@@ -2304,7 +2304,7 @@
           <p:cNvPr id="3" name="フッター プレースホルダー 2">
             <a:extLst>
               <a:ext uri="{FF2B5EF4-FFF2-40B4-BE49-F238E27FC236}">
-                <a16:creationId xmlns:a16="http://schemas.microsoft.com/office/drawing/2014/main" id="{E4D5D531-C5E3-9CE0-5958-3053B1C7E3DB}"/>
+                <a16:creationId xmlns:a16="http://schemas.microsoft.com/office/drawing/2014/main" id="{5D765F79-F90D-E0C0-1F1A-56D4E8A66EB5}"/>
               </a:ext>
             </a:extLst>
           </p:cNvPr>
@@ -2329,7 +2329,7 @@
           <p:cNvPr id="4" name="スライド番号プレースホルダー 3">
             <a:extLst>
               <a:ext uri="{FF2B5EF4-FFF2-40B4-BE49-F238E27FC236}">
-                <a16:creationId xmlns:a16="http://schemas.microsoft.com/office/drawing/2014/main" id="{9D675778-FBE2-52B7-7332-E68BC978DC3E}"/>
+                <a16:creationId xmlns:a16="http://schemas.microsoft.com/office/drawing/2014/main" id="{28F166BB-BAA0-B0AC-B0BF-BEF40B60BCE0}"/>
               </a:ext>
             </a:extLst>
           </p:cNvPr>
@@ -2345,7 +2345,7 @@
           <a:bodyPr/>
           <a:lstStyle/>
           <a:p>
-            <a:fld id="{118B8FC8-DC37-4BC4-9B7B-CFD53EE29822}" type="slidenum">
+            <a:fld id="{2B4D0C7B-E581-45B6-BF77-AB7BC2B8D965}" type="slidenum">
               <a:rPr kumimoji="1" lang="ja-JP" altLang="en-US" smtClean="0"/>
               <a:t>‹#›</a:t>
             </a:fld>
@@ -2356,7 +2356,7 @@
     </p:spTree>
     <p:extLst>
       <p:ext uri="{BB962C8B-B14F-4D97-AF65-F5344CB8AC3E}">
-        <p14:creationId xmlns:p14="http://schemas.microsoft.com/office/powerpoint/2010/main" val="717226876"/>
+        <p14:creationId xmlns:p14="http://schemas.microsoft.com/office/powerpoint/2010/main" val="1304476940"/>
       </p:ext>
     </p:extLst>
   </p:cSld>
@@ -2388,7 +2388,7 @@
           <p:cNvPr id="2" name="タイトル 1">
             <a:extLst>
               <a:ext uri="{FF2B5EF4-FFF2-40B4-BE49-F238E27FC236}">
-                <a16:creationId xmlns:a16="http://schemas.microsoft.com/office/drawing/2014/main" id="{591B14E0-2365-CD6E-FD31-52D855CF7850}"/>
+                <a16:creationId xmlns:a16="http://schemas.microsoft.com/office/drawing/2014/main" id="{6A503D7C-ADCA-EDB2-8D3D-267123882D96}"/>
               </a:ext>
             </a:extLst>
           </p:cNvPr>
@@ -2425,7 +2425,7 @@
           <p:cNvPr id="3" name="コンテンツ プレースホルダー 2">
             <a:extLst>
               <a:ext uri="{FF2B5EF4-FFF2-40B4-BE49-F238E27FC236}">
-                <a16:creationId xmlns:a16="http://schemas.microsoft.com/office/drawing/2014/main" id="{60BB7A6C-9CBB-D8E9-1F3E-E32A69342974}"/>
+                <a16:creationId xmlns:a16="http://schemas.microsoft.com/office/drawing/2014/main" id="{27803C5F-3909-B2FE-E333-BDED778FB4E8}"/>
               </a:ext>
             </a:extLst>
           </p:cNvPr>
@@ -2547,7 +2547,7 @@
           <p:cNvPr id="4" name="テキスト プレースホルダー 3">
             <a:extLst>
               <a:ext uri="{FF2B5EF4-FFF2-40B4-BE49-F238E27FC236}">
-                <a16:creationId xmlns:a16="http://schemas.microsoft.com/office/drawing/2014/main" id="{A1A64669-9EEE-5F0C-EF03-F8399BB170CC}"/>
+                <a16:creationId xmlns:a16="http://schemas.microsoft.com/office/drawing/2014/main" id="{F663E44B-234D-F541-B6DF-75B2F3235959}"/>
               </a:ext>
             </a:extLst>
           </p:cNvPr>
@@ -2618,7 +2618,7 @@
           <p:cNvPr id="5" name="日付プレースホルダー 4">
             <a:extLst>
               <a:ext uri="{FF2B5EF4-FFF2-40B4-BE49-F238E27FC236}">
-                <a16:creationId xmlns:a16="http://schemas.microsoft.com/office/drawing/2014/main" id="{64EE5CF4-5D5C-43DE-83C8-3C76AF4D064F}"/>
+                <a16:creationId xmlns:a16="http://schemas.microsoft.com/office/drawing/2014/main" id="{40D0730B-50CA-F89B-0FE5-276312285BCA}"/>
               </a:ext>
             </a:extLst>
           </p:cNvPr>
@@ -2634,7 +2634,7 @@
           <a:bodyPr/>
           <a:lstStyle/>
           <a:p>
-            <a:fld id="{6336A5B6-2F89-4EAA-B501-F554C52F59AC}" type="datetimeFigureOut">
+            <a:fld id="{B4538FFC-6BF6-4B0F-8014-60B4912D1308}" type="datetimeFigureOut">
               <a:rPr kumimoji="1" lang="ja-JP" altLang="en-US" smtClean="0"/>
               <a:t>2026/7/30</a:t>
             </a:fld>
@@ -2647,7 +2647,7 @@
           <p:cNvPr id="6" name="フッター プレースホルダー 5">
             <a:extLst>
               <a:ext uri="{FF2B5EF4-FFF2-40B4-BE49-F238E27FC236}">
-                <a16:creationId xmlns:a16="http://schemas.microsoft.com/office/drawing/2014/main" id="{77AAC55C-B7FF-3DB7-FB0F-FD092D4B64FA}"/>
+                <a16:creationId xmlns:a16="http://schemas.microsoft.com/office/drawing/2014/main" id="{DBB7D2CB-6C6E-EDFB-6EF0-03DF75C3E1E4}"/>
               </a:ext>
             </a:extLst>
           </p:cNvPr>
@@ -2672,7 +2672,7 @@
           <p:cNvPr id="7" name="スライド番号プレースホルダー 6">
             <a:extLst>
               <a:ext uri="{FF2B5EF4-FFF2-40B4-BE49-F238E27FC236}">
-                <a16:creationId xmlns:a16="http://schemas.microsoft.com/office/drawing/2014/main" id="{CD3B337C-30D6-6E51-614A-F0D225A0646C}"/>
+                <a16:creationId xmlns:a16="http://schemas.microsoft.com/office/drawing/2014/main" id="{C4AEC01A-F5F7-42E2-AD9F-881CDDB8758A}"/>
               </a:ext>
             </a:extLst>
           </p:cNvPr>
@@ -2688,7 +2688,7 @@
           <a:bodyPr/>
           <a:lstStyle/>
           <a:p>
-            <a:fld id="{118B8FC8-DC37-4BC4-9B7B-CFD53EE29822}" type="slidenum">
+            <a:fld id="{2B4D0C7B-E581-45B6-BF77-AB7BC2B8D965}" type="slidenum">
               <a:rPr kumimoji="1" lang="ja-JP" altLang="en-US" smtClean="0"/>
               <a:t>‹#›</a:t>
             </a:fld>
@@ -2699,7 +2699,7 @@
     </p:spTree>
     <p:extLst>
       <p:ext uri="{BB962C8B-B14F-4D97-AF65-F5344CB8AC3E}">
-        <p14:creationId xmlns:p14="http://schemas.microsoft.com/office/powerpoint/2010/main" val="3984156919"/>
+        <p14:creationId xmlns:p14="http://schemas.microsoft.com/office/powerpoint/2010/main" val="1806578142"/>
       </p:ext>
     </p:extLst>
   </p:cSld>
@@ -2731,7 +2731,7 @@
           <p:cNvPr id="2" name="タイトル 1">
             <a:extLst>
               <a:ext uri="{FF2B5EF4-FFF2-40B4-BE49-F238E27FC236}">
-                <a16:creationId xmlns:a16="http://schemas.microsoft.com/office/drawing/2014/main" id="{4D654DFF-3005-8499-535D-7EE9A33E2103}"/>
+                <a16:creationId xmlns:a16="http://schemas.microsoft.com/office/drawing/2014/main" id="{93D9411C-45A4-4D2B-3550-55D41FD0BE41}"/>
               </a:ext>
             </a:extLst>
           </p:cNvPr>
@@ -2768,7 +2768,7 @@
           <p:cNvPr id="3" name="図プレースホルダー 2">
             <a:extLst>
               <a:ext uri="{FF2B5EF4-FFF2-40B4-BE49-F238E27FC236}">
-                <a16:creationId xmlns:a16="http://schemas.microsoft.com/office/drawing/2014/main" id="{DDB9AC51-A347-83BC-6B62-FE6BE5F69AAB}"/>
+                <a16:creationId xmlns:a16="http://schemas.microsoft.com/office/drawing/2014/main" id="{898C4726-B8D7-8342-7D5C-56E974151420}"/>
               </a:ext>
             </a:extLst>
           </p:cNvPr>
@@ -2835,7 +2835,7 @@
           <p:cNvPr id="4" name="テキスト プレースホルダー 3">
             <a:extLst>
               <a:ext uri="{FF2B5EF4-FFF2-40B4-BE49-F238E27FC236}">
-                <a16:creationId xmlns:a16="http://schemas.microsoft.com/office/drawing/2014/main" id="{08063D81-8DA3-A696-C729-84B07AFBDA43}"/>
+                <a16:creationId xmlns:a16="http://schemas.microsoft.com/office/drawing/2014/main" id="{0946AB7D-626C-9B1C-4D87-C90504073193}"/>
               </a:ext>
             </a:extLst>
           </p:cNvPr>
@@ -2906,7 +2906,7 @@
           <p:cNvPr id="5" name="日付プレースホルダー 4">
             <a:extLst>
               <a:ext uri="{FF2B5EF4-FFF2-40B4-BE49-F238E27FC236}">
-                <a16:creationId xmlns:a16="http://schemas.microsoft.com/office/drawing/2014/main" id="{4BFEDCEA-4C10-9BC1-4531-0D7EA1CB47B8}"/>
+                <a16:creationId xmlns:a16="http://schemas.microsoft.com/office/drawing/2014/main" id="{54A89866-EB3D-1F33-B053-99D6A8BEA7D4}"/>
               </a:ext>
             </a:extLst>
           </p:cNvPr>
@@ -2922,7 +2922,7 @@
           <a:bodyPr/>
           <a:lstStyle/>
           <a:p>
-            <a:fld id="{6336A5B6-2F89-4EAA-B501-F554C52F59AC}" type="datetimeFigureOut">
+            <a:fld id="{B4538FFC-6BF6-4B0F-8014-60B4912D1308}" type="datetimeFigureOut">
               <a:rPr kumimoji="1" lang="ja-JP" altLang="en-US" smtClean="0"/>
               <a:t>2026/7/30</a:t>
             </a:fld>
@@ -2935,7 +2935,7 @@
           <p:cNvPr id="6" name="フッター プレースホルダー 5">
             <a:extLst>
               <a:ext uri="{FF2B5EF4-FFF2-40B4-BE49-F238E27FC236}">
-                <a16:creationId xmlns:a16="http://schemas.microsoft.com/office/drawing/2014/main" id="{37E1459C-22E8-4E9C-C5E9-5DC64583DE4E}"/>
+                <a16:creationId xmlns:a16="http://schemas.microsoft.com/office/drawing/2014/main" id="{B1B653AD-8CDE-F2AF-79F3-1A1A7CD7A3C9}"/>
               </a:ext>
             </a:extLst>
           </p:cNvPr>
@@ -2960,7 +2960,7 @@
           <p:cNvPr id="7" name="スライド番号プレースホルダー 6">
             <a:extLst>
               <a:ext uri="{FF2B5EF4-FFF2-40B4-BE49-F238E27FC236}">
-                <a16:creationId xmlns:a16="http://schemas.microsoft.com/office/drawing/2014/main" id="{6B681E4E-183E-6F31-260B-EC41B5FE9724}"/>
+                <a16:creationId xmlns:a16="http://schemas.microsoft.com/office/drawing/2014/main" id="{461DCC39-ABB8-340D-E227-64ED98527534}"/>
               </a:ext>
             </a:extLst>
           </p:cNvPr>
@@ -2976,7 +2976,7 @@
           <a:bodyPr/>
           <a:lstStyle/>
           <a:p>
-            <a:fld id="{118B8FC8-DC37-4BC4-9B7B-CFD53EE29822}" type="slidenum">
+            <a:fld id="{2B4D0C7B-E581-45B6-BF77-AB7BC2B8D965}" type="slidenum">
               <a:rPr kumimoji="1" lang="ja-JP" altLang="en-US" smtClean="0"/>
               <a:t>‹#›</a:t>
             </a:fld>
@@ -2987,7 +2987,7 @@
     </p:spTree>
     <p:extLst>
       <p:ext uri="{BB962C8B-B14F-4D97-AF65-F5344CB8AC3E}">
-        <p14:creationId xmlns:p14="http://schemas.microsoft.com/office/powerpoint/2010/main" val="4005801456"/>
+        <p14:creationId xmlns:p14="http://schemas.microsoft.com/office/powerpoint/2010/main" val="1301738924"/>
       </p:ext>
     </p:extLst>
   </p:cSld>
@@ -3024,7 +3024,7 @@
           <p:cNvPr id="2" name="タイトル プレースホルダー 1">
             <a:extLst>
               <a:ext uri="{FF2B5EF4-FFF2-40B4-BE49-F238E27FC236}">
-                <a16:creationId xmlns:a16="http://schemas.microsoft.com/office/drawing/2014/main" id="{86A3D121-66DE-FB6D-1315-42BD5546C399}"/>
+                <a16:creationId xmlns:a16="http://schemas.microsoft.com/office/drawing/2014/main" id="{418AA08E-469C-4251-529F-B6ECFE0F292A}"/>
               </a:ext>
             </a:extLst>
           </p:cNvPr>
@@ -3062,7 +3062,7 @@
           <p:cNvPr id="3" name="テキスト プレースホルダー 2">
             <a:extLst>
               <a:ext uri="{FF2B5EF4-FFF2-40B4-BE49-F238E27FC236}">
-                <a16:creationId xmlns:a16="http://schemas.microsoft.com/office/drawing/2014/main" id="{89066EED-F8B6-FBDD-76A7-B505C91A5FCE}"/>
+                <a16:creationId xmlns:a16="http://schemas.microsoft.com/office/drawing/2014/main" id="{97315226-1585-9A77-81AC-F162C82D981E}"/>
               </a:ext>
             </a:extLst>
           </p:cNvPr>
@@ -3161,7 +3161,7 @@
           <p:cNvPr id="4" name="日付プレースホルダー 3">
             <a:extLst>
               <a:ext uri="{FF2B5EF4-FFF2-40B4-BE49-F238E27FC236}">
-                <a16:creationId xmlns:a16="http://schemas.microsoft.com/office/drawing/2014/main" id="{6B477570-352D-C918-F4D9-9DF099EFF8CB}"/>
+                <a16:creationId xmlns:a16="http://schemas.microsoft.com/office/drawing/2014/main" id="{DDC0BF54-DEFE-3B1F-0A2B-9D98C70C7406}"/>
               </a:ext>
             </a:extLst>
           </p:cNvPr>
@@ -3195,7 +3195,7 @@
             </a:lvl1pPr>
           </a:lstStyle>
           <a:p>
-            <a:fld id="{6336A5B6-2F89-4EAA-B501-F554C52F59AC}" type="datetimeFigureOut">
+            <a:fld id="{B4538FFC-6BF6-4B0F-8014-60B4912D1308}" type="datetimeFigureOut">
               <a:rPr kumimoji="1" lang="ja-JP" altLang="en-US" smtClean="0"/>
               <a:t>2026/7/30</a:t>
             </a:fld>
@@ -3208,7 +3208,7 @@
           <p:cNvPr id="5" name="フッター プレースホルダー 4">
             <a:extLst>
               <a:ext uri="{FF2B5EF4-FFF2-40B4-BE49-F238E27FC236}">
-                <a16:creationId xmlns:a16="http://schemas.microsoft.com/office/drawing/2014/main" id="{4EE8D8B4-3C09-D513-0294-1E563CCA520E}"/>
+                <a16:creationId xmlns:a16="http://schemas.microsoft.com/office/drawing/2014/main" id="{88B7F004-58FD-6696-4A47-3B886CFC0B61}"/>
               </a:ext>
             </a:extLst>
           </p:cNvPr>
@@ -3251,7 +3251,7 @@
           <p:cNvPr id="6" name="スライド番号プレースホルダー 5">
             <a:extLst>
               <a:ext uri="{FF2B5EF4-FFF2-40B4-BE49-F238E27FC236}">
-                <a16:creationId xmlns:a16="http://schemas.microsoft.com/office/drawing/2014/main" id="{4AE6CEBF-28BC-F090-7898-B2650B35F534}"/>
+                <a16:creationId xmlns:a16="http://schemas.microsoft.com/office/drawing/2014/main" id="{750AF129-1F76-2BDD-CD36-7C18F57BA2CE}"/>
               </a:ext>
             </a:extLst>
           </p:cNvPr>
@@ -3285,7 +3285,7 @@
             </a:lvl1pPr>
           </a:lstStyle>
           <a:p>
-            <a:fld id="{118B8FC8-DC37-4BC4-9B7B-CFD53EE29822}" type="slidenum">
+            <a:fld id="{2B4D0C7B-E581-45B6-BF77-AB7BC2B8D965}" type="slidenum">
               <a:rPr kumimoji="1" lang="ja-JP" altLang="en-US" smtClean="0"/>
               <a:t>‹#›</a:t>
             </a:fld>
@@ -3296,7 +3296,7 @@
     </p:spTree>
     <p:extLst>
       <p:ext uri="{BB962C8B-B14F-4D97-AF65-F5344CB8AC3E}">
-        <p14:creationId xmlns:p14="http://schemas.microsoft.com/office/powerpoint/2010/main" val="3542404712"/>
+        <p14:creationId xmlns:p14="http://schemas.microsoft.com/office/powerpoint/2010/main" val="1836654428"/>
       </p:ext>
     </p:extLst>
   </p:cSld>
@@ -3619,7 +3619,7 @@
           <p:cNvPr id="2" name="テキスト ボックス 1">
             <a:extLst>
               <a:ext uri="{FF2B5EF4-FFF2-40B4-BE49-F238E27FC236}">
-                <a16:creationId xmlns:a16="http://schemas.microsoft.com/office/drawing/2014/main" id="{FF6801A4-BF85-19D3-6FED-CD154DBF2988}"/>
+                <a16:creationId xmlns:a16="http://schemas.microsoft.com/office/drawing/2014/main" id="{12BD1FF6-D8EC-04AC-EBCF-C09B0C1B3F0C}"/>
               </a:ext>
             </a:extLst>
           </p:cNvPr>
@@ -3665,7 +3665,7 @@
           <p:cNvPr id="3" name="テキスト ボックス 2">
             <a:extLst>
               <a:ext uri="{FF2B5EF4-FFF2-40B4-BE49-F238E27FC236}">
-                <a16:creationId xmlns:a16="http://schemas.microsoft.com/office/drawing/2014/main" id="{2671F4EE-D488-DB9F-8D59-C09E77E16AC7}"/>
+                <a16:creationId xmlns:a16="http://schemas.microsoft.com/office/drawing/2014/main" id="{C2851A84-D42E-BFDC-5273-C93439468861}"/>
               </a:ext>
             </a:extLst>
           </p:cNvPr>
@@ -3695,14 +3695,17 @@
                 </a:solidFill>
                 <a:latin typeface="Arial" panose="020B0604020202020204" pitchFamily="34" charset="0"/>
               </a:rPr>
-              <a:t>gemecard-portal TECH EXPLANATION</a:t>
-            </a:r>
-            <a:endParaRPr kumimoji="1" lang="ja-JP" altLang="en-US" sz="3400" b="1">
-              <a:solidFill>
-                <a:srgbClr val="111111"/>
-              </a:solidFill>
-              <a:latin typeface="Arial" panose="020B0604020202020204" pitchFamily="34" charset="0"/>
-            </a:endParaRPr>
+              <a:t>Gemecard Portal</a:t>
+            </a:r>
+            <a:r>
+              <a:rPr kumimoji="1" lang="ja-JP" altLang="en-US" sz="3400" b="1">
+                <a:solidFill>
+                  <a:srgbClr val="111111"/>
+                </a:solidFill>
+                <a:latin typeface="Arial" panose="020B0604020202020204" pitchFamily="34" charset="0"/>
+              </a:rPr>
+              <a:t>の技術解説</a:t>
+            </a:r>
           </a:p>
         </p:txBody>
       </p:sp>
@@ -3711,7 +3714,7 @@
           <p:cNvPr id="4" name="テキスト ボックス 3">
             <a:extLst>
               <a:ext uri="{FF2B5EF4-FFF2-40B4-BE49-F238E27FC236}">
-                <a16:creationId xmlns:a16="http://schemas.microsoft.com/office/drawing/2014/main" id="{F6B367E9-B66C-EEAA-1DBA-E68C99B96C69}"/>
+                <a16:creationId xmlns:a16="http://schemas.microsoft.com/office/drawing/2014/main" id="{11DC2A74-CF5D-8132-6954-E3FCD4892DB1}"/>
               </a:ext>
             </a:extLst>
           </p:cNvPr>
@@ -3735,20 +3738,14 @@
           <a:lstStyle/>
           <a:p>
             <a:r>
-              <a:rPr kumimoji="1" lang="en-US" altLang="ja-JP" sz="2000">
+              <a:rPr kumimoji="1" lang="ja-JP" altLang="en-US" sz="2000">
                 <a:solidFill>
                   <a:srgbClr val="333333"/>
                 </a:solidFill>
                 <a:latin typeface="Arial" panose="020B0604020202020204" pitchFamily="34" charset="0"/>
               </a:rPr>
-              <a:t>Architecture, implementation and commit history in 75 seconds</a:t>
-            </a:r>
-            <a:endParaRPr kumimoji="1" lang="ja-JP" altLang="en-US" sz="2000">
-              <a:solidFill>
-                <a:srgbClr val="333333"/>
-              </a:solidFill>
-              <a:latin typeface="Arial" panose="020B0604020202020204" pitchFamily="34" charset="0"/>
-            </a:endParaRPr>
+              <a:t>設計・実装・コミットから学ぶ短時間プレビュー</a:t>
+            </a:r>
           </a:p>
         </p:txBody>
       </p:sp>
@@ -3757,7 +3754,7 @@
           <p:cNvPr id="5" name="テキスト ボックス 4">
             <a:extLst>
               <a:ext uri="{FF2B5EF4-FFF2-40B4-BE49-F238E27FC236}">
-                <a16:creationId xmlns:a16="http://schemas.microsoft.com/office/drawing/2014/main" id="{C9F508F3-1778-402B-FE5A-0E74F88F0B22}"/>
+                <a16:creationId xmlns:a16="http://schemas.microsoft.com/office/drawing/2014/main" id="{49FEBF1E-CEC0-192E-792A-85138FFF5BC8}"/>
               </a:ext>
             </a:extLst>
           </p:cNvPr>
@@ -3804,7 +3801,7 @@
             <a:hlinkClick r:id="" action="ppaction://media"/>
             <a:extLst>
               <a:ext uri="{FF2B5EF4-FFF2-40B4-BE49-F238E27FC236}">
-                <a16:creationId xmlns:a16="http://schemas.microsoft.com/office/drawing/2014/main" id="{7506E4AF-BEFD-A678-766B-210F99AC0374}"/>
+                <a16:creationId xmlns:a16="http://schemas.microsoft.com/office/drawing/2014/main" id="{3E043CFA-8C3D-15AB-07F6-22B7A3179EA4}"/>
               </a:ext>
             </a:extLst>
           </p:cNvPr>
@@ -3839,7 +3836,7 @@
     </p:spTree>
     <p:extLst>
       <p:ext uri="{BB962C8B-B14F-4D97-AF65-F5344CB8AC3E}">
-        <p14:creationId xmlns:p14="http://schemas.microsoft.com/office/powerpoint/2010/main" val="1581623296"/>
+        <p14:creationId xmlns:p14="http://schemas.microsoft.com/office/powerpoint/2010/main" val="1059161220"/>
       </p:ext>
     </p:extLst>
   </p:cSld>
@@ -3963,7 +3960,7 @@
           <p:cNvPr id="2" name="テキスト ボックス 1">
             <a:extLst>
               <a:ext uri="{FF2B5EF4-FFF2-40B4-BE49-F238E27FC236}">
-                <a16:creationId xmlns:a16="http://schemas.microsoft.com/office/drawing/2014/main" id="{9D47E034-22D0-00DE-2461-16D24009A74B}"/>
+                <a16:creationId xmlns:a16="http://schemas.microsoft.com/office/drawing/2014/main" id="{5E7DDF22-4736-CA50-9E76-D00DDD874961}"/>
               </a:ext>
             </a:extLst>
           </p:cNvPr>
@@ -4009,7 +4006,7 @@
           <p:cNvPr id="3" name="テキスト ボックス 2">
             <a:extLst>
               <a:ext uri="{FF2B5EF4-FFF2-40B4-BE49-F238E27FC236}">
-                <a16:creationId xmlns:a16="http://schemas.microsoft.com/office/drawing/2014/main" id="{84659D30-816F-9FE8-DADE-8C45967BC25F}"/>
+                <a16:creationId xmlns:a16="http://schemas.microsoft.com/office/drawing/2014/main" id="{968265E2-1124-D352-9065-B47314338D01}"/>
               </a:ext>
             </a:extLst>
           </p:cNvPr>
@@ -4033,20 +4030,14 @@
           <a:lstStyle/>
           <a:p>
             <a:r>
-              <a:rPr kumimoji="1" lang="en-US" altLang="ja-JP" sz="3400" b="1">
+              <a:rPr kumimoji="1" lang="ja-JP" altLang="en-US" sz="3400" b="1">
                 <a:solidFill>
                   <a:srgbClr val="111111"/>
                 </a:solidFill>
                 <a:latin typeface="Arial" panose="020B0604020202020204" pitchFamily="34" charset="0"/>
               </a:rPr>
-              <a:t>WHAT DOES IT SOLVE?</a:t>
-            </a:r>
-            <a:endParaRPr kumimoji="1" lang="ja-JP" altLang="en-US" sz="3400" b="1">
-              <a:solidFill>
-                <a:srgbClr val="111111"/>
-              </a:solidFill>
-              <a:latin typeface="Arial" panose="020B0604020202020204" pitchFamily="34" charset="0"/>
-            </a:endParaRPr>
+              <a:t>このプロジェクトは何を解決する？</a:t>
+            </a:r>
           </a:p>
         </p:txBody>
       </p:sp>
@@ -4055,7 +4046,7 @@
           <p:cNvPr id="4" name="テキスト ボックス 3">
             <a:extLst>
               <a:ext uri="{FF2B5EF4-FFF2-40B4-BE49-F238E27FC236}">
-                <a16:creationId xmlns:a16="http://schemas.microsoft.com/office/drawing/2014/main" id="{B6C47070-ABCC-DAA9-56C9-0F42AB66A8BF}"/>
+                <a16:creationId xmlns:a16="http://schemas.microsoft.com/office/drawing/2014/main" id="{5CAA89C2-D21B-69F0-3FAF-F66CA34BFDC9}"/>
               </a:ext>
             </a:extLst>
           </p:cNvPr>
@@ -4101,7 +4092,7 @@
           <p:cNvPr id="5" name="テキスト ボックス 4">
             <a:extLst>
               <a:ext uri="{FF2B5EF4-FFF2-40B4-BE49-F238E27FC236}">
-                <a16:creationId xmlns:a16="http://schemas.microsoft.com/office/drawing/2014/main" id="{63E975AE-FD8D-8760-4D0B-3ADBF55C0455}"/>
+                <a16:creationId xmlns:a16="http://schemas.microsoft.com/office/drawing/2014/main" id="{3FA1D859-ABA2-BB49-F527-0F87495CCB3D}"/>
               </a:ext>
             </a:extLst>
           </p:cNvPr>
@@ -4148,7 +4139,7 @@
             <a:hlinkClick r:id="" action="ppaction://media"/>
             <a:extLst>
               <a:ext uri="{FF2B5EF4-FFF2-40B4-BE49-F238E27FC236}">
-                <a16:creationId xmlns:a16="http://schemas.microsoft.com/office/drawing/2014/main" id="{86318D7F-7488-BEC6-6BA8-2844C7240AA4}"/>
+                <a16:creationId xmlns:a16="http://schemas.microsoft.com/office/drawing/2014/main" id="{1F99EB57-2556-4F27-7FB1-520AD2AD3368}"/>
               </a:ext>
             </a:extLst>
           </p:cNvPr>
@@ -4183,7 +4174,7 @@
     </p:spTree>
     <p:extLst>
       <p:ext uri="{BB962C8B-B14F-4D97-AF65-F5344CB8AC3E}">
-        <p14:creationId xmlns:p14="http://schemas.microsoft.com/office/powerpoint/2010/main" val="2838374356"/>
+        <p14:creationId xmlns:p14="http://schemas.microsoft.com/office/powerpoint/2010/main" val="368253913"/>
       </p:ext>
     </p:extLst>
   </p:cSld>
@@ -4307,7 +4298,7 @@
           <p:cNvPr id="2" name="テキスト ボックス 1">
             <a:extLst>
               <a:ext uri="{FF2B5EF4-FFF2-40B4-BE49-F238E27FC236}">
-                <a16:creationId xmlns:a16="http://schemas.microsoft.com/office/drawing/2014/main" id="{D4AB4205-B362-756F-84C9-7CD76C9A4D06}"/>
+                <a16:creationId xmlns:a16="http://schemas.microsoft.com/office/drawing/2014/main" id="{A089D02A-D9E7-D293-ADB8-2C472670294B}"/>
               </a:ext>
             </a:extLst>
           </p:cNvPr>
@@ -4353,7 +4344,7 @@
           <p:cNvPr id="3" name="テキスト ボックス 2">
             <a:extLst>
               <a:ext uri="{FF2B5EF4-FFF2-40B4-BE49-F238E27FC236}">
-                <a16:creationId xmlns:a16="http://schemas.microsoft.com/office/drawing/2014/main" id="{2C943F12-7D7F-3AE9-FE64-4553BAFE28AF}"/>
+                <a16:creationId xmlns:a16="http://schemas.microsoft.com/office/drawing/2014/main" id="{2E0444DC-9A96-6864-A032-620DD7A44608}"/>
               </a:ext>
             </a:extLst>
           </p:cNvPr>
@@ -4377,20 +4368,14 @@
           <a:lstStyle/>
           <a:p>
             <a:r>
-              <a:rPr kumimoji="1" lang="en-US" altLang="ja-JP" sz="3400" b="1">
+              <a:rPr kumimoji="1" lang="ja-JP" altLang="en-US" sz="3400" b="1">
                 <a:solidFill>
                   <a:srgbClr val="111111"/>
                 </a:solidFill>
                 <a:latin typeface="Arial" panose="020B0604020202020204" pitchFamily="34" charset="0"/>
               </a:rPr>
-              <a:t>TECH STACK</a:t>
-            </a:r>
-            <a:endParaRPr kumimoji="1" lang="ja-JP" altLang="en-US" sz="3400" b="1">
-              <a:solidFill>
-                <a:srgbClr val="111111"/>
-              </a:solidFill>
-              <a:latin typeface="Arial" panose="020B0604020202020204" pitchFamily="34" charset="0"/>
-            </a:endParaRPr>
+              <a:t>技術スタック</a:t>
+            </a:r>
           </a:p>
         </p:txBody>
       </p:sp>
@@ -4399,7 +4384,7 @@
           <p:cNvPr id="4" name="テキスト ボックス 3">
             <a:extLst>
               <a:ext uri="{FF2B5EF4-FFF2-40B4-BE49-F238E27FC236}">
-                <a16:creationId xmlns:a16="http://schemas.microsoft.com/office/drawing/2014/main" id="{1C8CC82E-EE51-8CAF-13B4-0E9F99970E33}"/>
+                <a16:creationId xmlns:a16="http://schemas.microsoft.com/office/drawing/2014/main" id="{AA3218DA-B262-F47A-AC52-DE77C020CF8A}"/>
               </a:ext>
             </a:extLst>
           </p:cNvPr>
@@ -4409,7 +4394,7 @@
         <p:spPr>
           <a:xfrm>
             <a:off x="533400" y="3429000"/>
-            <a:ext cx="10795000" cy="400110"/>
+            <a:ext cx="10795000" cy="707886"/>
           </a:xfrm>
           <a:prstGeom prst="rect">
             <a:avLst/>
@@ -4423,13 +4408,22 @@
           <a:lstStyle/>
           <a:p>
             <a:r>
+              <a:rPr kumimoji="1" lang="ja-JP" altLang="en-US" sz="2000">
+                <a:solidFill>
+                  <a:srgbClr val="333333"/>
+                </a:solidFill>
+                <a:latin typeface="Arial" panose="020B0604020202020204" pitchFamily="34" charset="0"/>
+              </a:rPr>
+              <a:t>主要技術：</a:t>
+            </a:r>
+            <a:r>
               <a:rPr kumimoji="1" lang="en-US" altLang="ja-JP" sz="2000">
                 <a:solidFill>
                   <a:srgbClr val="333333"/>
                 </a:solidFill>
                 <a:latin typeface="Arial" panose="020B0604020202020204" pitchFamily="34" charset="0"/>
               </a:rPr>
-              <a:t>Primary technologies: TypeScript</a:t>
+              <a:t>TypeScript</a:t>
             </a:r>
             <a:r>
               <a:rPr kumimoji="1" lang="ja-JP" altLang="en-US" sz="2000">
@@ -4465,14 +4459,18 @@
                 </a:solidFill>
                 <a:latin typeface="Arial" panose="020B0604020202020204" pitchFamily="34" charset="0"/>
               </a:rPr>
-              <a:t>CSS</a:t>
-            </a:r>
-            <a:endParaRPr kumimoji="1" lang="ja-JP" altLang="en-US" sz="2000">
-              <a:solidFill>
-                <a:srgbClr val="333333"/>
-              </a:solidFill>
-              <a:latin typeface="Arial" panose="020B0604020202020204" pitchFamily="34" charset="0"/>
-            </a:endParaRPr>
+              <a:t>CSS
+</a:t>
+            </a:r>
+            <a:r>
+              <a:rPr kumimoji="1" lang="ja-JP" altLang="en-US" sz="2000">
+                <a:solidFill>
+                  <a:srgbClr val="333333"/>
+                </a:solidFill>
+                <a:latin typeface="Arial" panose="020B0604020202020204" pitchFamily="34" charset="0"/>
+              </a:rPr>
+              <a:t>役割を分け、保守しやすい構成を目指しています。</a:t>
+            </a:r>
           </a:p>
         </p:txBody>
       </p:sp>
@@ -4481,7 +4479,7 @@
           <p:cNvPr id="5" name="テキスト ボックス 4">
             <a:extLst>
               <a:ext uri="{FF2B5EF4-FFF2-40B4-BE49-F238E27FC236}">
-                <a16:creationId xmlns:a16="http://schemas.microsoft.com/office/drawing/2014/main" id="{9992C370-B4C8-8BD6-E096-17B5A579FB98}"/>
+                <a16:creationId xmlns:a16="http://schemas.microsoft.com/office/drawing/2014/main" id="{8C400E8A-30C7-845C-ADE0-67CB15723A7C}"/>
               </a:ext>
             </a:extLst>
           </p:cNvPr>
@@ -4528,7 +4526,7 @@
             <a:hlinkClick r:id="" action="ppaction://media"/>
             <a:extLst>
               <a:ext uri="{FF2B5EF4-FFF2-40B4-BE49-F238E27FC236}">
-                <a16:creationId xmlns:a16="http://schemas.microsoft.com/office/drawing/2014/main" id="{67A551CC-9F8C-BA0C-C273-DE6B677A18F3}"/>
+                <a16:creationId xmlns:a16="http://schemas.microsoft.com/office/drawing/2014/main" id="{D3CCDCE3-9B47-ADEC-4EBF-705D70982B69}"/>
               </a:ext>
             </a:extLst>
           </p:cNvPr>
@@ -4563,7 +4561,7 @@
     </p:spTree>
     <p:extLst>
       <p:ext uri="{BB962C8B-B14F-4D97-AF65-F5344CB8AC3E}">
-        <p14:creationId xmlns:p14="http://schemas.microsoft.com/office/powerpoint/2010/main" val="3054902878"/>
+        <p14:creationId xmlns:p14="http://schemas.microsoft.com/office/powerpoint/2010/main" val="2706120823"/>
       </p:ext>
     </p:extLst>
   </p:cSld>
@@ -4687,7 +4685,7 @@
           <p:cNvPr id="2" name="テキスト ボックス 1">
             <a:extLst>
               <a:ext uri="{FF2B5EF4-FFF2-40B4-BE49-F238E27FC236}">
-                <a16:creationId xmlns:a16="http://schemas.microsoft.com/office/drawing/2014/main" id="{E969CD28-4AA4-BDF7-8F17-8D1489E07C2D}"/>
+                <a16:creationId xmlns:a16="http://schemas.microsoft.com/office/drawing/2014/main" id="{23E133FA-A75F-38CE-4AF3-D8F86BB76722}"/>
               </a:ext>
             </a:extLst>
           </p:cNvPr>
@@ -4733,7 +4731,7 @@
           <p:cNvPr id="3" name="テキスト ボックス 2">
             <a:extLst>
               <a:ext uri="{FF2B5EF4-FFF2-40B4-BE49-F238E27FC236}">
-                <a16:creationId xmlns:a16="http://schemas.microsoft.com/office/drawing/2014/main" id="{391BDD6F-9B42-3133-1AEF-DBEC9F40E10C}"/>
+                <a16:creationId xmlns:a16="http://schemas.microsoft.com/office/drawing/2014/main" id="{5B21F77A-CEDA-66E3-10E9-F27162D183C5}"/>
               </a:ext>
             </a:extLst>
           </p:cNvPr>
@@ -4757,20 +4755,14 @@
           <a:lstStyle/>
           <a:p>
             <a:r>
-              <a:rPr kumimoji="1" lang="en-US" altLang="ja-JP" sz="3400" b="1">
+              <a:rPr kumimoji="1" lang="ja-JP" altLang="en-US" sz="3400" b="1">
                 <a:solidFill>
                   <a:srgbClr val="111111"/>
                 </a:solidFill>
                 <a:latin typeface="Arial" panose="020B0604020202020204" pitchFamily="34" charset="0"/>
               </a:rPr>
-              <a:t>REPOSITORY HIGHLIGHTS</a:t>
-            </a:r>
-            <a:endParaRPr kumimoji="1" lang="ja-JP" altLang="en-US" sz="3400" b="1">
-              <a:solidFill>
-                <a:srgbClr val="111111"/>
-              </a:solidFill>
-              <a:latin typeface="Arial" panose="020B0604020202020204" pitchFamily="34" charset="0"/>
-            </a:endParaRPr>
+              <a:t>リポジトリの読みどころ</a:t>
+            </a:r>
           </a:p>
         </p:txBody>
       </p:sp>
@@ -4779,7 +4771,7 @@
           <p:cNvPr id="4" name="テキスト ボックス 3">
             <a:extLst>
               <a:ext uri="{FF2B5EF4-FFF2-40B4-BE49-F238E27FC236}">
-                <a16:creationId xmlns:a16="http://schemas.microsoft.com/office/drawing/2014/main" id="{37402E05-990A-92C7-0D11-572B6F4B136B}"/>
+                <a16:creationId xmlns:a16="http://schemas.microsoft.com/office/drawing/2014/main" id="{1D03595A-F65B-D126-6D79-7428EE784249}"/>
               </a:ext>
             </a:extLst>
           </p:cNvPr>
@@ -4789,7 +4781,7 @@
         <p:spPr>
           <a:xfrm>
             <a:off x="533400" y="3429000"/>
-            <a:ext cx="10795000" cy="400110"/>
+            <a:ext cx="10795000" cy="707886"/>
           </a:xfrm>
           <a:prstGeom prst="rect">
             <a:avLst/>
@@ -4803,13 +4795,77 @@
           <a:lstStyle/>
           <a:p>
             <a:r>
+              <a:rPr kumimoji="1" lang="ja-JP" altLang="en-US" sz="2000">
+                <a:solidFill>
+                  <a:srgbClr val="333333"/>
+                </a:solidFill>
+                <a:latin typeface="Arial" panose="020B0604020202020204" pitchFamily="34" charset="0"/>
+              </a:rPr>
+              <a:t>公開コード、</a:t>
+            </a:r>
+            <a:r>
               <a:rPr kumimoji="1" lang="en-US" altLang="ja-JP" sz="2000">
                 <a:solidFill>
                   <a:srgbClr val="333333"/>
                 </a:solidFill>
                 <a:latin typeface="Arial" panose="020B0604020202020204" pitchFamily="34" charset="0"/>
               </a:rPr>
-              <a:t>Public source code, README and commit history reveal the design decisions.</a:t>
+              <a:t>README</a:t>
+            </a:r>
+            <a:r>
+              <a:rPr kumimoji="1" lang="ja-JP" altLang="en-US" sz="2000">
+                <a:solidFill>
+                  <a:srgbClr val="333333"/>
+                </a:solidFill>
+                <a:latin typeface="Arial" panose="020B0604020202020204" pitchFamily="34" charset="0"/>
+              </a:rPr>
+              <a:t>、コミット履歴から設計判断を確認できます。
+主なファイル：</a:t>
+            </a:r>
+            <a:r>
+              <a:rPr kumimoji="1" lang="en-US" altLang="ja-JP" sz="2000">
+                <a:solidFill>
+                  <a:srgbClr val="333333"/>
+                </a:solidFill>
+                <a:latin typeface="Arial" panose="020B0604020202020204" pitchFamily="34" charset="0"/>
+              </a:rPr>
+              <a:t>AGENTS.md</a:t>
+            </a:r>
+            <a:r>
+              <a:rPr kumimoji="1" lang="ja-JP" altLang="en-US" sz="2000">
+                <a:solidFill>
+                  <a:srgbClr val="333333"/>
+                </a:solidFill>
+                <a:latin typeface="Arial" panose="020B0604020202020204" pitchFamily="34" charset="0"/>
+              </a:rPr>
+              <a:t>、</a:t>
+            </a:r>
+            <a:r>
+              <a:rPr kumimoji="1" lang="en-US" altLang="ja-JP" sz="2000">
+                <a:solidFill>
+                  <a:srgbClr val="333333"/>
+                </a:solidFill>
+                <a:latin typeface="Arial" panose="020B0604020202020204" pitchFamily="34" charset="0"/>
+              </a:rPr>
+              <a:t>CLAUDE.md</a:t>
+            </a:r>
+            <a:r>
+              <a:rPr kumimoji="1" lang="ja-JP" altLang="en-US" sz="2000">
+                <a:solidFill>
+                  <a:srgbClr val="333333"/>
+                </a:solidFill>
+                <a:latin typeface="Arial" panose="020B0604020202020204" pitchFamily="34" charset="0"/>
+              </a:rPr>
+              <a:t>、</a:t>
+            </a:r>
+            <a:r>
+              <a:rPr kumimoji="1" lang="en-US" altLang="ja-JP" sz="2000">
+                <a:solidFill>
+                  <a:srgbClr val="333333"/>
+                </a:solidFill>
+                <a:latin typeface="Arial" panose="020B0604020202020204" pitchFamily="34" charset="0"/>
+              </a:rPr>
+              <a:t>README.md</a:t>
             </a:r>
             <a:endParaRPr kumimoji="1" lang="ja-JP" altLang="en-US" sz="2000">
               <a:solidFill>
@@ -4825,7 +4881,7 @@
           <p:cNvPr id="5" name="テキスト ボックス 4">
             <a:extLst>
               <a:ext uri="{FF2B5EF4-FFF2-40B4-BE49-F238E27FC236}">
-                <a16:creationId xmlns:a16="http://schemas.microsoft.com/office/drawing/2014/main" id="{DA56FA67-6BF4-CAAF-75B4-4E049529ED66}"/>
+                <a16:creationId xmlns:a16="http://schemas.microsoft.com/office/drawing/2014/main" id="{A24B09B6-881A-2307-B763-250CF9B236EA}"/>
               </a:ext>
             </a:extLst>
           </p:cNvPr>
@@ -4872,7 +4928,7 @@
             <a:hlinkClick r:id="" action="ppaction://media"/>
             <a:extLst>
               <a:ext uri="{FF2B5EF4-FFF2-40B4-BE49-F238E27FC236}">
-                <a16:creationId xmlns:a16="http://schemas.microsoft.com/office/drawing/2014/main" id="{CF5A04BC-3DF9-A662-04FA-83DD15A4F4C4}"/>
+                <a16:creationId xmlns:a16="http://schemas.microsoft.com/office/drawing/2014/main" id="{C3CC8F8D-0718-80F6-3F90-A8008FACFD56}"/>
               </a:ext>
             </a:extLst>
           </p:cNvPr>
@@ -4907,7 +4963,7 @@
     </p:spTree>
     <p:extLst>
       <p:ext uri="{BB962C8B-B14F-4D97-AF65-F5344CB8AC3E}">
-        <p14:creationId xmlns:p14="http://schemas.microsoft.com/office/powerpoint/2010/main" val="2958462897"/>
+        <p14:creationId xmlns:p14="http://schemas.microsoft.com/office/powerpoint/2010/main" val="4056548407"/>
       </p:ext>
     </p:extLst>
   </p:cSld>
@@ -5031,7 +5087,7 @@
           <p:cNvPr id="2" name="テキスト ボックス 1">
             <a:extLst>
               <a:ext uri="{FF2B5EF4-FFF2-40B4-BE49-F238E27FC236}">
-                <a16:creationId xmlns:a16="http://schemas.microsoft.com/office/drawing/2014/main" id="{8C0728CB-D0FA-8CC7-2B0F-F03545ED8683}"/>
+                <a16:creationId xmlns:a16="http://schemas.microsoft.com/office/drawing/2014/main" id="{8BB78A6A-B77D-FFB3-601D-3FD4CC07CD80}"/>
               </a:ext>
             </a:extLst>
           </p:cNvPr>
@@ -5077,7 +5133,7 @@
           <p:cNvPr id="3" name="テキスト ボックス 2">
             <a:extLst>
               <a:ext uri="{FF2B5EF4-FFF2-40B4-BE49-F238E27FC236}">
-                <a16:creationId xmlns:a16="http://schemas.microsoft.com/office/drawing/2014/main" id="{7C752255-F3AD-519E-B59E-C6EBE3F7833D}"/>
+                <a16:creationId xmlns:a16="http://schemas.microsoft.com/office/drawing/2014/main" id="{30CC4934-742B-5A70-5B4E-B7D5B0C67277}"/>
               </a:ext>
             </a:extLst>
           </p:cNvPr>
@@ -5101,20 +5157,14 @@
           <a:lstStyle/>
           <a:p>
             <a:r>
-              <a:rPr kumimoji="1" lang="en-US" altLang="ja-JP" sz="3400" b="1">
+              <a:rPr kumimoji="1" lang="ja-JP" altLang="en-US" sz="3400" b="1">
                 <a:solidFill>
                   <a:srgbClr val="111111"/>
                 </a:solidFill>
                 <a:latin typeface="Arial" panose="020B0604020202020204" pitchFamily="34" charset="0"/>
               </a:rPr>
-              <a:t>ITERATIVE IMPROVEMENT</a:t>
-            </a:r>
-            <a:endParaRPr kumimoji="1" lang="ja-JP" altLang="en-US" sz="3400" b="1">
-              <a:solidFill>
-                <a:srgbClr val="111111"/>
-              </a:solidFill>
-              <a:latin typeface="Arial" panose="020B0604020202020204" pitchFamily="34" charset="0"/>
-            </a:endParaRPr>
+              <a:t>コミットから分かる改善</a:t>
+            </a:r>
           </a:p>
         </p:txBody>
       </p:sp>
@@ -5123,7 +5173,7 @@
           <p:cNvPr id="4" name="テキスト ボックス 3">
             <a:extLst>
               <a:ext uri="{FF2B5EF4-FFF2-40B4-BE49-F238E27FC236}">
-                <a16:creationId xmlns:a16="http://schemas.microsoft.com/office/drawing/2014/main" id="{9D10DDAD-E8B1-08FB-5BA0-E568D76D64C6}"/>
+                <a16:creationId xmlns:a16="http://schemas.microsoft.com/office/drawing/2014/main" id="{9ABE899D-E599-B533-A0D5-FEFCBB908833}"/>
               </a:ext>
             </a:extLst>
           </p:cNvPr>
@@ -5153,7 +5203,7 @@
                 </a:solidFill>
                 <a:latin typeface="Arial" panose="020B0604020202020204" pitchFamily="34" charset="0"/>
               </a:rPr>
-              <a:t>Small commits continuously improve features, quality and release readiness.</a:t>
+              <a:t>Initial gamecard portal: card companies, game titles, community board</a:t>
             </a:r>
             <a:endParaRPr kumimoji="1" lang="ja-JP" altLang="en-US" sz="2000">
               <a:solidFill>
@@ -5169,7 +5219,7 @@
           <p:cNvPr id="5" name="テキスト ボックス 4">
             <a:extLst>
               <a:ext uri="{FF2B5EF4-FFF2-40B4-BE49-F238E27FC236}">
-                <a16:creationId xmlns:a16="http://schemas.microsoft.com/office/drawing/2014/main" id="{153EF141-775D-ECE1-9FFE-11B6AF7DE5AA}"/>
+                <a16:creationId xmlns:a16="http://schemas.microsoft.com/office/drawing/2014/main" id="{5D5E4246-E6C0-5E53-8F11-5A53C161DFE9}"/>
               </a:ext>
             </a:extLst>
           </p:cNvPr>
@@ -5216,7 +5266,7 @@
             <a:hlinkClick r:id="" action="ppaction://media"/>
             <a:extLst>
               <a:ext uri="{FF2B5EF4-FFF2-40B4-BE49-F238E27FC236}">
-                <a16:creationId xmlns:a16="http://schemas.microsoft.com/office/drawing/2014/main" id="{D288D57A-2166-DE0B-7509-4F1162BC23F5}"/>
+                <a16:creationId xmlns:a16="http://schemas.microsoft.com/office/drawing/2014/main" id="{D21DF73A-B5AE-CEEA-D60E-AA7E402CD767}"/>
               </a:ext>
             </a:extLst>
           </p:cNvPr>
@@ -5251,7 +5301,7 @@
     </p:spTree>
     <p:extLst>
       <p:ext uri="{BB962C8B-B14F-4D97-AF65-F5344CB8AC3E}">
-        <p14:creationId xmlns:p14="http://schemas.microsoft.com/office/powerpoint/2010/main" val="2334634047"/>
+        <p14:creationId xmlns:p14="http://schemas.microsoft.com/office/powerpoint/2010/main" val="1395724402"/>
       </p:ext>
     </p:extLst>
   </p:cSld>
@@ -5375,7 +5425,7 @@
           <p:cNvPr id="2" name="テキスト ボックス 1">
             <a:extLst>
               <a:ext uri="{FF2B5EF4-FFF2-40B4-BE49-F238E27FC236}">
-                <a16:creationId xmlns:a16="http://schemas.microsoft.com/office/drawing/2014/main" id="{6F335EA9-5CE2-8E8A-D644-3E21ABE098A8}"/>
+                <a16:creationId xmlns:a16="http://schemas.microsoft.com/office/drawing/2014/main" id="{A22E9594-E9EB-E4C4-F47F-21C7CFC1D577}"/>
               </a:ext>
             </a:extLst>
           </p:cNvPr>
@@ -5421,7 +5471,7 @@
           <p:cNvPr id="3" name="テキスト ボックス 2">
             <a:extLst>
               <a:ext uri="{FF2B5EF4-FFF2-40B4-BE49-F238E27FC236}">
-                <a16:creationId xmlns:a16="http://schemas.microsoft.com/office/drawing/2014/main" id="{2A606537-6FA8-58C2-B141-0777D407CD0F}"/>
+                <a16:creationId xmlns:a16="http://schemas.microsoft.com/office/drawing/2014/main" id="{3E430A7D-9C7F-84DE-4A11-73E714A78583}"/>
               </a:ext>
             </a:extLst>
           </p:cNvPr>
@@ -5445,20 +5495,14 @@
           <a:lstStyle/>
           <a:p>
             <a:r>
-              <a:rPr kumimoji="1" lang="en-US" altLang="ja-JP" sz="3400" b="1">
+              <a:rPr kumimoji="1" lang="ja-JP" altLang="en-US" sz="3400" b="1">
                 <a:solidFill>
                   <a:srgbClr val="111111"/>
                 </a:solidFill>
                 <a:latin typeface="Arial" panose="020B0604020202020204" pitchFamily="34" charset="0"/>
               </a:rPr>
-              <a:t>READ THE FULL ARTICLE</a:t>
-            </a:r>
-            <a:endParaRPr kumimoji="1" lang="ja-JP" altLang="en-US" sz="3400" b="1">
-              <a:solidFill>
-                <a:srgbClr val="111111"/>
-              </a:solidFill>
-              <a:latin typeface="Arial" panose="020B0604020202020204" pitchFamily="34" charset="0"/>
-            </a:endParaRPr>
+              <a:t>詳しくは積み上げログへ</a:t>
+            </a:r>
           </a:p>
         </p:txBody>
       </p:sp>
@@ -5467,7 +5511,7 @@
           <p:cNvPr id="4" name="テキスト ボックス 3">
             <a:extLst>
               <a:ext uri="{FF2B5EF4-FFF2-40B4-BE49-F238E27FC236}">
-                <a16:creationId xmlns:a16="http://schemas.microsoft.com/office/drawing/2014/main" id="{C763583F-243E-4180-83B9-B66C2F4C51CA}"/>
+                <a16:creationId xmlns:a16="http://schemas.microsoft.com/office/drawing/2014/main" id="{0CA9772A-82B3-EF89-F31B-DB46DDE669F8}"/>
               </a:ext>
             </a:extLst>
           </p:cNvPr>
@@ -5491,14 +5535,32 @@
           <a:lstStyle/>
           <a:p>
             <a:r>
-              <a:rPr kumimoji="1" lang="sv-SE" altLang="ja-JP" sz="2000">
+              <a:rPr kumimoji="1" lang="zh-TW" altLang="en-US" sz="2000">
+                <a:solidFill>
+                  <a:srgbClr val="333333"/>
+                </a:solidFill>
+                <a:latin typeface="Arial" panose="020B0604020202020204" pitchFamily="34" charset="0"/>
+              </a:rPr>
+              <a:t>記事： </a:t>
+            </a:r>
+            <a:r>
+              <a:rPr kumimoji="1" lang="en-US" altLang="zh-TW" sz="2000">
                 <a:solidFill>
                   <a:srgbClr val="333333"/>
                 </a:solidFill>
                 <a:latin typeface="Arial" panose="020B0604020202020204" pitchFamily="34" charset="0"/>
               </a:rPr>
               <a:t>https://syunnjack.dev/articles/gemecard-portal
-TSUMIAGE LOG</a:t>
+</a:t>
+            </a:r>
+            <a:r>
+              <a:rPr kumimoji="1" lang="zh-TW" altLang="en-US" sz="2000">
+                <a:solidFill>
+                  <a:srgbClr val="333333"/>
+                </a:solidFill>
+                <a:latin typeface="Arial" panose="020B0604020202020204" pitchFamily="34" charset="0"/>
+              </a:rPr>
+              <a:t>学び、作り、振り返る開発記録。</a:t>
             </a:r>
             <a:endParaRPr kumimoji="1" lang="ja-JP" altLang="en-US" sz="2000">
               <a:solidFill>
@@ -5514,7 +5576,7 @@
           <p:cNvPr id="5" name="テキスト ボックス 4">
             <a:extLst>
               <a:ext uri="{FF2B5EF4-FFF2-40B4-BE49-F238E27FC236}">
-                <a16:creationId xmlns:a16="http://schemas.microsoft.com/office/drawing/2014/main" id="{4774CAB0-D0B4-C6CE-1580-52CC9D681901}"/>
+                <a16:creationId xmlns:a16="http://schemas.microsoft.com/office/drawing/2014/main" id="{62D0AC5C-FE61-3649-5D24-BA78C2C3FF19}"/>
               </a:ext>
             </a:extLst>
           </p:cNvPr>
@@ -5561,7 +5623,7 @@
             <a:hlinkClick r:id="" action="ppaction://media"/>
             <a:extLst>
               <a:ext uri="{FF2B5EF4-FFF2-40B4-BE49-F238E27FC236}">
-                <a16:creationId xmlns:a16="http://schemas.microsoft.com/office/drawing/2014/main" id="{00F1D472-B581-C6F0-81D9-56193D79ED0E}"/>
+                <a16:creationId xmlns:a16="http://schemas.microsoft.com/office/drawing/2014/main" id="{A4A6DCFF-937A-A63D-880E-9196BEEE3347}"/>
               </a:ext>
             </a:extLst>
           </p:cNvPr>
@@ -5596,7 +5658,7 @@
     </p:spTree>
     <p:extLst>
       <p:ext uri="{BB962C8B-B14F-4D97-AF65-F5344CB8AC3E}">
-        <p14:creationId xmlns:p14="http://schemas.microsoft.com/office/powerpoint/2010/main" val="2678471433"/>
+        <p14:creationId xmlns:p14="http://schemas.microsoft.com/office/powerpoint/2010/main" val="1381773379"/>
       </p:ext>
     </p:extLst>
   </p:cSld>

--- a/public/videos/repositories/gemecard-portal/gemecard-portal-tech-preview.pptx
+++ b/public/videos/repositories/gemecard-portal/gemecard-portal-tech-preview.pptx
@@ -134,7 +134,7 @@
           <p:cNvPr id="2" name="タイトル 1">
             <a:extLst>
               <a:ext uri="{FF2B5EF4-FFF2-40B4-BE49-F238E27FC236}">
-                <a16:creationId xmlns:a16="http://schemas.microsoft.com/office/drawing/2014/main" id="{1E63B1C1-8905-ECF7-BD98-54E4C9D0E545}"/>
+                <a16:creationId xmlns:a16="http://schemas.microsoft.com/office/drawing/2014/main" id="{8A5C7A7F-31A8-B662-6AB8-4A70D3F76304}"/>
               </a:ext>
             </a:extLst>
           </p:cNvPr>
@@ -171,7 +171,7 @@
           <p:cNvPr id="3" name="字幕 2">
             <a:extLst>
               <a:ext uri="{FF2B5EF4-FFF2-40B4-BE49-F238E27FC236}">
-                <a16:creationId xmlns:a16="http://schemas.microsoft.com/office/drawing/2014/main" id="{BD8C71EF-6C37-4FFA-FB05-A5A63D59FB84}"/>
+                <a16:creationId xmlns:a16="http://schemas.microsoft.com/office/drawing/2014/main" id="{F98D5BA3-2149-E39B-979F-6BE7FE5FDF80}"/>
               </a:ext>
             </a:extLst>
           </p:cNvPr>
@@ -241,7 +241,7 @@
           <p:cNvPr id="4" name="日付プレースホルダー 3">
             <a:extLst>
               <a:ext uri="{FF2B5EF4-FFF2-40B4-BE49-F238E27FC236}">
-                <a16:creationId xmlns:a16="http://schemas.microsoft.com/office/drawing/2014/main" id="{C1BB704E-457E-65CD-36B9-F66EADC8AE90}"/>
+                <a16:creationId xmlns:a16="http://schemas.microsoft.com/office/drawing/2014/main" id="{3C29DB03-4A6F-7C0C-FA5E-382AB0EB4116}"/>
               </a:ext>
             </a:extLst>
           </p:cNvPr>
@@ -257,7 +257,7 @@
           <a:bodyPr/>
           <a:lstStyle/>
           <a:p>
-            <a:fld id="{B4538FFC-6BF6-4B0F-8014-60B4912D1308}" type="datetimeFigureOut">
+            <a:fld id="{667C9F02-AC1C-45A8-AB6A-9852702887FF}" type="datetimeFigureOut">
               <a:rPr kumimoji="1" lang="ja-JP" altLang="en-US" smtClean="0"/>
               <a:t>2026/7/30</a:t>
             </a:fld>
@@ -270,7 +270,7 @@
           <p:cNvPr id="5" name="フッター プレースホルダー 4">
             <a:extLst>
               <a:ext uri="{FF2B5EF4-FFF2-40B4-BE49-F238E27FC236}">
-                <a16:creationId xmlns:a16="http://schemas.microsoft.com/office/drawing/2014/main" id="{8B974DCE-5C42-BF09-332B-E118B233FB54}"/>
+                <a16:creationId xmlns:a16="http://schemas.microsoft.com/office/drawing/2014/main" id="{841C1775-6409-8F65-42B7-DE8DA62E4B35}"/>
               </a:ext>
             </a:extLst>
           </p:cNvPr>
@@ -295,7 +295,7 @@
           <p:cNvPr id="6" name="スライド番号プレースホルダー 5">
             <a:extLst>
               <a:ext uri="{FF2B5EF4-FFF2-40B4-BE49-F238E27FC236}">
-                <a16:creationId xmlns:a16="http://schemas.microsoft.com/office/drawing/2014/main" id="{AE750BFF-A739-8410-3715-F398B45372D7}"/>
+                <a16:creationId xmlns:a16="http://schemas.microsoft.com/office/drawing/2014/main" id="{348C2698-6C46-3FE6-07FA-4E1FECF2D0F8}"/>
               </a:ext>
             </a:extLst>
           </p:cNvPr>
@@ -311,7 +311,7 @@
           <a:bodyPr/>
           <a:lstStyle/>
           <a:p>
-            <a:fld id="{2B4D0C7B-E581-45B6-BF77-AB7BC2B8D965}" type="slidenum">
+            <a:fld id="{4C524E73-2C4E-46B2-AA0F-6A9A7CBB572F}" type="slidenum">
               <a:rPr kumimoji="1" lang="ja-JP" altLang="en-US" smtClean="0"/>
               <a:t>‹#›</a:t>
             </a:fld>
@@ -322,7 +322,7 @@
     </p:spTree>
     <p:extLst>
       <p:ext uri="{BB962C8B-B14F-4D97-AF65-F5344CB8AC3E}">
-        <p14:creationId xmlns:p14="http://schemas.microsoft.com/office/powerpoint/2010/main" val="3186722026"/>
+        <p14:creationId xmlns:p14="http://schemas.microsoft.com/office/powerpoint/2010/main" val="533500352"/>
       </p:ext>
     </p:extLst>
   </p:cSld>
@@ -354,7 +354,7 @@
           <p:cNvPr id="2" name="タイトル 1">
             <a:extLst>
               <a:ext uri="{FF2B5EF4-FFF2-40B4-BE49-F238E27FC236}">
-                <a16:creationId xmlns:a16="http://schemas.microsoft.com/office/drawing/2014/main" id="{F22AECCF-4AAF-D2CF-5A43-A156F99D4B1E}"/>
+                <a16:creationId xmlns:a16="http://schemas.microsoft.com/office/drawing/2014/main" id="{1A0E24C5-3F86-356D-2D16-DA9B279B0F5A}"/>
               </a:ext>
             </a:extLst>
           </p:cNvPr>
@@ -382,7 +382,7 @@
           <p:cNvPr id="3" name="縦書きテキスト プレースホルダー 2">
             <a:extLst>
               <a:ext uri="{FF2B5EF4-FFF2-40B4-BE49-F238E27FC236}">
-                <a16:creationId xmlns:a16="http://schemas.microsoft.com/office/drawing/2014/main" id="{97CC5111-7EA3-4BD7-2287-945E76D4D114}"/>
+                <a16:creationId xmlns:a16="http://schemas.microsoft.com/office/drawing/2014/main" id="{4581B0C5-4475-83FB-44A1-95C22A1868AE}"/>
               </a:ext>
             </a:extLst>
           </p:cNvPr>
@@ -471,7 +471,7 @@
           <p:cNvPr id="4" name="日付プレースホルダー 3">
             <a:extLst>
               <a:ext uri="{FF2B5EF4-FFF2-40B4-BE49-F238E27FC236}">
-                <a16:creationId xmlns:a16="http://schemas.microsoft.com/office/drawing/2014/main" id="{581F2913-0268-0A71-4044-7834DBB004F5}"/>
+                <a16:creationId xmlns:a16="http://schemas.microsoft.com/office/drawing/2014/main" id="{06066828-0663-6DB8-969F-4BE6895E7F94}"/>
               </a:ext>
             </a:extLst>
           </p:cNvPr>
@@ -487,7 +487,7 @@
           <a:bodyPr/>
           <a:lstStyle/>
           <a:p>
-            <a:fld id="{B4538FFC-6BF6-4B0F-8014-60B4912D1308}" type="datetimeFigureOut">
+            <a:fld id="{667C9F02-AC1C-45A8-AB6A-9852702887FF}" type="datetimeFigureOut">
               <a:rPr kumimoji="1" lang="ja-JP" altLang="en-US" smtClean="0"/>
               <a:t>2026/7/30</a:t>
             </a:fld>
@@ -500,7 +500,7 @@
           <p:cNvPr id="5" name="フッター プレースホルダー 4">
             <a:extLst>
               <a:ext uri="{FF2B5EF4-FFF2-40B4-BE49-F238E27FC236}">
-                <a16:creationId xmlns:a16="http://schemas.microsoft.com/office/drawing/2014/main" id="{13D348CF-4660-D2F8-6C28-4B107F2EF8E8}"/>
+                <a16:creationId xmlns:a16="http://schemas.microsoft.com/office/drawing/2014/main" id="{581CDC8C-62DF-61CE-BCD2-D43603A85993}"/>
               </a:ext>
             </a:extLst>
           </p:cNvPr>
@@ -525,7 +525,7 @@
           <p:cNvPr id="6" name="スライド番号プレースホルダー 5">
             <a:extLst>
               <a:ext uri="{FF2B5EF4-FFF2-40B4-BE49-F238E27FC236}">
-                <a16:creationId xmlns:a16="http://schemas.microsoft.com/office/drawing/2014/main" id="{CD50DFA4-5616-3944-4ADA-CBAD5D12F2A4}"/>
+                <a16:creationId xmlns:a16="http://schemas.microsoft.com/office/drawing/2014/main" id="{1BE2879A-5C3F-E67B-8102-EA68E4136F0E}"/>
               </a:ext>
             </a:extLst>
           </p:cNvPr>
@@ -541,7 +541,7 @@
           <a:bodyPr/>
           <a:lstStyle/>
           <a:p>
-            <a:fld id="{2B4D0C7B-E581-45B6-BF77-AB7BC2B8D965}" type="slidenum">
+            <a:fld id="{4C524E73-2C4E-46B2-AA0F-6A9A7CBB572F}" type="slidenum">
               <a:rPr kumimoji="1" lang="ja-JP" altLang="en-US" smtClean="0"/>
               <a:t>‹#›</a:t>
             </a:fld>
@@ -552,7 +552,7 @@
     </p:spTree>
     <p:extLst>
       <p:ext uri="{BB962C8B-B14F-4D97-AF65-F5344CB8AC3E}">
-        <p14:creationId xmlns:p14="http://schemas.microsoft.com/office/powerpoint/2010/main" val="759178870"/>
+        <p14:creationId xmlns:p14="http://schemas.microsoft.com/office/powerpoint/2010/main" val="818653126"/>
       </p:ext>
     </p:extLst>
   </p:cSld>
@@ -584,7 +584,7 @@
           <p:cNvPr id="2" name="縦書きタイトル 1">
             <a:extLst>
               <a:ext uri="{FF2B5EF4-FFF2-40B4-BE49-F238E27FC236}">
-                <a16:creationId xmlns:a16="http://schemas.microsoft.com/office/drawing/2014/main" id="{90D9B788-C261-9A6C-FD9B-68711133A03C}"/>
+                <a16:creationId xmlns:a16="http://schemas.microsoft.com/office/drawing/2014/main" id="{0990C555-1EE0-8217-BB3A-105F3EA74DA7}"/>
               </a:ext>
             </a:extLst>
           </p:cNvPr>
@@ -617,7 +617,7 @@
           <p:cNvPr id="3" name="縦書きテキスト プレースホルダー 2">
             <a:extLst>
               <a:ext uri="{FF2B5EF4-FFF2-40B4-BE49-F238E27FC236}">
-                <a16:creationId xmlns:a16="http://schemas.microsoft.com/office/drawing/2014/main" id="{A36D2D27-1D00-9FA8-46CB-C35996F751BE}"/>
+                <a16:creationId xmlns:a16="http://schemas.microsoft.com/office/drawing/2014/main" id="{9D08A48E-8136-E034-2763-CC26FDC920A3}"/>
               </a:ext>
             </a:extLst>
           </p:cNvPr>
@@ -711,7 +711,7 @@
           <p:cNvPr id="4" name="日付プレースホルダー 3">
             <a:extLst>
               <a:ext uri="{FF2B5EF4-FFF2-40B4-BE49-F238E27FC236}">
-                <a16:creationId xmlns:a16="http://schemas.microsoft.com/office/drawing/2014/main" id="{7C455226-B362-A3ED-E2BD-7C095808B29D}"/>
+                <a16:creationId xmlns:a16="http://schemas.microsoft.com/office/drawing/2014/main" id="{5D01D33A-31B4-C988-10D2-13F0E30DA557}"/>
               </a:ext>
             </a:extLst>
           </p:cNvPr>
@@ -727,7 +727,7 @@
           <a:bodyPr/>
           <a:lstStyle/>
           <a:p>
-            <a:fld id="{B4538FFC-6BF6-4B0F-8014-60B4912D1308}" type="datetimeFigureOut">
+            <a:fld id="{667C9F02-AC1C-45A8-AB6A-9852702887FF}" type="datetimeFigureOut">
               <a:rPr kumimoji="1" lang="ja-JP" altLang="en-US" smtClean="0"/>
               <a:t>2026/7/30</a:t>
             </a:fld>
@@ -740,7 +740,7 @@
           <p:cNvPr id="5" name="フッター プレースホルダー 4">
             <a:extLst>
               <a:ext uri="{FF2B5EF4-FFF2-40B4-BE49-F238E27FC236}">
-                <a16:creationId xmlns:a16="http://schemas.microsoft.com/office/drawing/2014/main" id="{E013A78C-9163-0191-016F-41B1BB6AC626}"/>
+                <a16:creationId xmlns:a16="http://schemas.microsoft.com/office/drawing/2014/main" id="{2CE4C854-70E3-562F-6664-234DA7FF7BC3}"/>
               </a:ext>
             </a:extLst>
           </p:cNvPr>
@@ -765,7 +765,7 @@
           <p:cNvPr id="6" name="スライド番号プレースホルダー 5">
             <a:extLst>
               <a:ext uri="{FF2B5EF4-FFF2-40B4-BE49-F238E27FC236}">
-                <a16:creationId xmlns:a16="http://schemas.microsoft.com/office/drawing/2014/main" id="{B0D24602-01A3-5653-7F47-AA3159ECA4EB}"/>
+                <a16:creationId xmlns:a16="http://schemas.microsoft.com/office/drawing/2014/main" id="{A69F105D-DF3C-D40E-E8DA-54A30242A752}"/>
               </a:ext>
             </a:extLst>
           </p:cNvPr>
@@ -781,7 +781,7 @@
           <a:bodyPr/>
           <a:lstStyle/>
           <a:p>
-            <a:fld id="{2B4D0C7B-E581-45B6-BF77-AB7BC2B8D965}" type="slidenum">
+            <a:fld id="{4C524E73-2C4E-46B2-AA0F-6A9A7CBB572F}" type="slidenum">
               <a:rPr kumimoji="1" lang="ja-JP" altLang="en-US" smtClean="0"/>
               <a:t>‹#›</a:t>
             </a:fld>
@@ -792,7 +792,7 @@
     </p:spTree>
     <p:extLst>
       <p:ext uri="{BB962C8B-B14F-4D97-AF65-F5344CB8AC3E}">
-        <p14:creationId xmlns:p14="http://schemas.microsoft.com/office/powerpoint/2010/main" val="2132255878"/>
+        <p14:creationId xmlns:p14="http://schemas.microsoft.com/office/powerpoint/2010/main" val="1970683957"/>
       </p:ext>
     </p:extLst>
   </p:cSld>
@@ -824,7 +824,7 @@
           <p:cNvPr id="2" name="タイトル 1">
             <a:extLst>
               <a:ext uri="{FF2B5EF4-FFF2-40B4-BE49-F238E27FC236}">
-                <a16:creationId xmlns:a16="http://schemas.microsoft.com/office/drawing/2014/main" id="{B4516FDC-4007-34D9-1D7F-3BE0CBA3C074}"/>
+                <a16:creationId xmlns:a16="http://schemas.microsoft.com/office/drawing/2014/main" id="{260EABE5-121F-8626-4186-F9B6CB2F1027}"/>
               </a:ext>
             </a:extLst>
           </p:cNvPr>
@@ -852,7 +852,7 @@
           <p:cNvPr id="3" name="コンテンツ プレースホルダー 2">
             <a:extLst>
               <a:ext uri="{FF2B5EF4-FFF2-40B4-BE49-F238E27FC236}">
-                <a16:creationId xmlns:a16="http://schemas.microsoft.com/office/drawing/2014/main" id="{2B80F920-8ECF-4F95-8DCA-3590811139B1}"/>
+                <a16:creationId xmlns:a16="http://schemas.microsoft.com/office/drawing/2014/main" id="{2E8508F2-EF10-BA14-22BB-C0BD0C8ACFF3}"/>
               </a:ext>
             </a:extLst>
           </p:cNvPr>
@@ -941,7 +941,7 @@
           <p:cNvPr id="4" name="日付プレースホルダー 3">
             <a:extLst>
               <a:ext uri="{FF2B5EF4-FFF2-40B4-BE49-F238E27FC236}">
-                <a16:creationId xmlns:a16="http://schemas.microsoft.com/office/drawing/2014/main" id="{7835294D-6799-C5C0-CB62-FAC0E8AE65AB}"/>
+                <a16:creationId xmlns:a16="http://schemas.microsoft.com/office/drawing/2014/main" id="{54E46E29-5F0A-8678-4C37-90AC2F8C4994}"/>
               </a:ext>
             </a:extLst>
           </p:cNvPr>
@@ -957,7 +957,7 @@
           <a:bodyPr/>
           <a:lstStyle/>
           <a:p>
-            <a:fld id="{B4538FFC-6BF6-4B0F-8014-60B4912D1308}" type="datetimeFigureOut">
+            <a:fld id="{667C9F02-AC1C-45A8-AB6A-9852702887FF}" type="datetimeFigureOut">
               <a:rPr kumimoji="1" lang="ja-JP" altLang="en-US" smtClean="0"/>
               <a:t>2026/7/30</a:t>
             </a:fld>
@@ -970,7 +970,7 @@
           <p:cNvPr id="5" name="フッター プレースホルダー 4">
             <a:extLst>
               <a:ext uri="{FF2B5EF4-FFF2-40B4-BE49-F238E27FC236}">
-                <a16:creationId xmlns:a16="http://schemas.microsoft.com/office/drawing/2014/main" id="{D48EB565-21F5-E398-8351-83B8BCB380F4}"/>
+                <a16:creationId xmlns:a16="http://schemas.microsoft.com/office/drawing/2014/main" id="{9BE4652D-24DD-0CB3-CA0B-AE326F4F7E0E}"/>
               </a:ext>
             </a:extLst>
           </p:cNvPr>
@@ -995,7 +995,7 @@
           <p:cNvPr id="6" name="スライド番号プレースホルダー 5">
             <a:extLst>
               <a:ext uri="{FF2B5EF4-FFF2-40B4-BE49-F238E27FC236}">
-                <a16:creationId xmlns:a16="http://schemas.microsoft.com/office/drawing/2014/main" id="{3AFCEC97-4649-0933-1A66-CB3915FEB7B4}"/>
+                <a16:creationId xmlns:a16="http://schemas.microsoft.com/office/drawing/2014/main" id="{AA52F829-6DAB-C51A-EF36-736B5035ACEC}"/>
               </a:ext>
             </a:extLst>
           </p:cNvPr>
@@ -1011,7 +1011,7 @@
           <a:bodyPr/>
           <a:lstStyle/>
           <a:p>
-            <a:fld id="{2B4D0C7B-E581-45B6-BF77-AB7BC2B8D965}" type="slidenum">
+            <a:fld id="{4C524E73-2C4E-46B2-AA0F-6A9A7CBB572F}" type="slidenum">
               <a:rPr kumimoji="1" lang="ja-JP" altLang="en-US" smtClean="0"/>
               <a:t>‹#›</a:t>
             </a:fld>
@@ -1022,7 +1022,7 @@
     </p:spTree>
     <p:extLst>
       <p:ext uri="{BB962C8B-B14F-4D97-AF65-F5344CB8AC3E}">
-        <p14:creationId xmlns:p14="http://schemas.microsoft.com/office/powerpoint/2010/main" val="1106066219"/>
+        <p14:creationId xmlns:p14="http://schemas.microsoft.com/office/powerpoint/2010/main" val="418110940"/>
       </p:ext>
     </p:extLst>
   </p:cSld>
@@ -1054,7 +1054,7 @@
           <p:cNvPr id="2" name="タイトル 1">
             <a:extLst>
               <a:ext uri="{FF2B5EF4-FFF2-40B4-BE49-F238E27FC236}">
-                <a16:creationId xmlns:a16="http://schemas.microsoft.com/office/drawing/2014/main" id="{0BEC3E13-D37C-CEEC-BF1A-AABF0AFCC929}"/>
+                <a16:creationId xmlns:a16="http://schemas.microsoft.com/office/drawing/2014/main" id="{53317144-6832-A162-35F5-1EEBBCB62B59}"/>
               </a:ext>
             </a:extLst>
           </p:cNvPr>
@@ -1091,7 +1091,7 @@
           <p:cNvPr id="3" name="テキスト プレースホルダー 2">
             <a:extLst>
               <a:ext uri="{FF2B5EF4-FFF2-40B4-BE49-F238E27FC236}">
-                <a16:creationId xmlns:a16="http://schemas.microsoft.com/office/drawing/2014/main" id="{D80A94F1-58DA-926D-AC3A-D6A402F109DE}"/>
+                <a16:creationId xmlns:a16="http://schemas.microsoft.com/office/drawing/2014/main" id="{15E13804-9100-0585-8ED0-EBFC4054C7FF}"/>
               </a:ext>
             </a:extLst>
           </p:cNvPr>
@@ -1216,7 +1216,7 @@
           <p:cNvPr id="4" name="日付プレースホルダー 3">
             <a:extLst>
               <a:ext uri="{FF2B5EF4-FFF2-40B4-BE49-F238E27FC236}">
-                <a16:creationId xmlns:a16="http://schemas.microsoft.com/office/drawing/2014/main" id="{55AA3CBB-03CE-E66B-EDFC-4380A95DB8E8}"/>
+                <a16:creationId xmlns:a16="http://schemas.microsoft.com/office/drawing/2014/main" id="{B66DF9DF-5FBC-E666-02F9-A2C3324FBBB1}"/>
               </a:ext>
             </a:extLst>
           </p:cNvPr>
@@ -1232,7 +1232,7 @@
           <a:bodyPr/>
           <a:lstStyle/>
           <a:p>
-            <a:fld id="{B4538FFC-6BF6-4B0F-8014-60B4912D1308}" type="datetimeFigureOut">
+            <a:fld id="{667C9F02-AC1C-45A8-AB6A-9852702887FF}" type="datetimeFigureOut">
               <a:rPr kumimoji="1" lang="ja-JP" altLang="en-US" smtClean="0"/>
               <a:t>2026/7/30</a:t>
             </a:fld>
@@ -1245,7 +1245,7 @@
           <p:cNvPr id="5" name="フッター プレースホルダー 4">
             <a:extLst>
               <a:ext uri="{FF2B5EF4-FFF2-40B4-BE49-F238E27FC236}">
-                <a16:creationId xmlns:a16="http://schemas.microsoft.com/office/drawing/2014/main" id="{2FA34963-F113-E59F-A65A-8208F770F890}"/>
+                <a16:creationId xmlns:a16="http://schemas.microsoft.com/office/drawing/2014/main" id="{129E1826-731A-D45E-7834-989E0B879AA2}"/>
               </a:ext>
             </a:extLst>
           </p:cNvPr>
@@ -1270,7 +1270,7 @@
           <p:cNvPr id="6" name="スライド番号プレースホルダー 5">
             <a:extLst>
               <a:ext uri="{FF2B5EF4-FFF2-40B4-BE49-F238E27FC236}">
-                <a16:creationId xmlns:a16="http://schemas.microsoft.com/office/drawing/2014/main" id="{84C53029-F941-417D-E33F-707B67FD4A7F}"/>
+                <a16:creationId xmlns:a16="http://schemas.microsoft.com/office/drawing/2014/main" id="{3BDF0F0F-A758-11CD-1E2F-D3A1CB2E15BA}"/>
               </a:ext>
             </a:extLst>
           </p:cNvPr>
@@ -1286,7 +1286,7 @@
           <a:bodyPr/>
           <a:lstStyle/>
           <a:p>
-            <a:fld id="{2B4D0C7B-E581-45B6-BF77-AB7BC2B8D965}" type="slidenum">
+            <a:fld id="{4C524E73-2C4E-46B2-AA0F-6A9A7CBB572F}" type="slidenum">
               <a:rPr kumimoji="1" lang="ja-JP" altLang="en-US" smtClean="0"/>
               <a:t>‹#›</a:t>
             </a:fld>
@@ -1297,7 +1297,7 @@
     </p:spTree>
     <p:extLst>
       <p:ext uri="{BB962C8B-B14F-4D97-AF65-F5344CB8AC3E}">
-        <p14:creationId xmlns:p14="http://schemas.microsoft.com/office/powerpoint/2010/main" val="3876713034"/>
+        <p14:creationId xmlns:p14="http://schemas.microsoft.com/office/powerpoint/2010/main" val="902216450"/>
       </p:ext>
     </p:extLst>
   </p:cSld>
@@ -1329,7 +1329,7 @@
           <p:cNvPr id="2" name="タイトル 1">
             <a:extLst>
               <a:ext uri="{FF2B5EF4-FFF2-40B4-BE49-F238E27FC236}">
-                <a16:creationId xmlns:a16="http://schemas.microsoft.com/office/drawing/2014/main" id="{73383546-7400-C8C7-C206-AF7107E84F44}"/>
+                <a16:creationId xmlns:a16="http://schemas.microsoft.com/office/drawing/2014/main" id="{34F34053-B249-9A47-7352-6D999988CFD7}"/>
               </a:ext>
             </a:extLst>
           </p:cNvPr>
@@ -1357,7 +1357,7 @@
           <p:cNvPr id="3" name="コンテンツ プレースホルダー 2">
             <a:extLst>
               <a:ext uri="{FF2B5EF4-FFF2-40B4-BE49-F238E27FC236}">
-                <a16:creationId xmlns:a16="http://schemas.microsoft.com/office/drawing/2014/main" id="{73A5A5EB-B50D-71BA-16A9-5DC2D8334869}"/>
+                <a16:creationId xmlns:a16="http://schemas.microsoft.com/office/drawing/2014/main" id="{8684DAC2-8DFA-30FB-7C9B-AC505B3788F8}"/>
               </a:ext>
             </a:extLst>
           </p:cNvPr>
@@ -1451,7 +1451,7 @@
           <p:cNvPr id="4" name="コンテンツ プレースホルダー 3">
             <a:extLst>
               <a:ext uri="{FF2B5EF4-FFF2-40B4-BE49-F238E27FC236}">
-                <a16:creationId xmlns:a16="http://schemas.microsoft.com/office/drawing/2014/main" id="{D0487B3B-5264-9596-94B7-9312522E4EF6}"/>
+                <a16:creationId xmlns:a16="http://schemas.microsoft.com/office/drawing/2014/main" id="{E3A10451-C68D-3CEB-A933-2F81ADE347DB}"/>
               </a:ext>
             </a:extLst>
           </p:cNvPr>
@@ -1545,7 +1545,7 @@
           <p:cNvPr id="5" name="日付プレースホルダー 4">
             <a:extLst>
               <a:ext uri="{FF2B5EF4-FFF2-40B4-BE49-F238E27FC236}">
-                <a16:creationId xmlns:a16="http://schemas.microsoft.com/office/drawing/2014/main" id="{E7582563-71BB-A99B-CD6B-4CD9509923E7}"/>
+                <a16:creationId xmlns:a16="http://schemas.microsoft.com/office/drawing/2014/main" id="{241320ED-91D4-789A-97D1-60EDEC074433}"/>
               </a:ext>
             </a:extLst>
           </p:cNvPr>
@@ -1561,7 +1561,7 @@
           <a:bodyPr/>
           <a:lstStyle/>
           <a:p>
-            <a:fld id="{B4538FFC-6BF6-4B0F-8014-60B4912D1308}" type="datetimeFigureOut">
+            <a:fld id="{667C9F02-AC1C-45A8-AB6A-9852702887FF}" type="datetimeFigureOut">
               <a:rPr kumimoji="1" lang="ja-JP" altLang="en-US" smtClean="0"/>
               <a:t>2026/7/30</a:t>
             </a:fld>
@@ -1574,7 +1574,7 @@
           <p:cNvPr id="6" name="フッター プレースホルダー 5">
             <a:extLst>
               <a:ext uri="{FF2B5EF4-FFF2-40B4-BE49-F238E27FC236}">
-                <a16:creationId xmlns:a16="http://schemas.microsoft.com/office/drawing/2014/main" id="{1E014A21-0AF9-9CE0-3AF6-B8B0240299E0}"/>
+                <a16:creationId xmlns:a16="http://schemas.microsoft.com/office/drawing/2014/main" id="{8AB3F491-579A-C53C-16A6-89883DD75464}"/>
               </a:ext>
             </a:extLst>
           </p:cNvPr>
@@ -1599,7 +1599,7 @@
           <p:cNvPr id="7" name="スライド番号プレースホルダー 6">
             <a:extLst>
               <a:ext uri="{FF2B5EF4-FFF2-40B4-BE49-F238E27FC236}">
-                <a16:creationId xmlns:a16="http://schemas.microsoft.com/office/drawing/2014/main" id="{B519EB7D-56C3-A7E2-2A25-DA2B8CAC575A}"/>
+                <a16:creationId xmlns:a16="http://schemas.microsoft.com/office/drawing/2014/main" id="{7420DDDE-27DF-B4DB-A5D6-CA1273A6E2E4}"/>
               </a:ext>
             </a:extLst>
           </p:cNvPr>
@@ -1615,7 +1615,7 @@
           <a:bodyPr/>
           <a:lstStyle/>
           <a:p>
-            <a:fld id="{2B4D0C7B-E581-45B6-BF77-AB7BC2B8D965}" type="slidenum">
+            <a:fld id="{4C524E73-2C4E-46B2-AA0F-6A9A7CBB572F}" type="slidenum">
               <a:rPr kumimoji="1" lang="ja-JP" altLang="en-US" smtClean="0"/>
               <a:t>‹#›</a:t>
             </a:fld>
@@ -1626,7 +1626,7 @@
     </p:spTree>
     <p:extLst>
       <p:ext uri="{BB962C8B-B14F-4D97-AF65-F5344CB8AC3E}">
-        <p14:creationId xmlns:p14="http://schemas.microsoft.com/office/powerpoint/2010/main" val="1072915277"/>
+        <p14:creationId xmlns:p14="http://schemas.microsoft.com/office/powerpoint/2010/main" val="1656720760"/>
       </p:ext>
     </p:extLst>
   </p:cSld>
@@ -1658,7 +1658,7 @@
           <p:cNvPr id="2" name="タイトル 1">
             <a:extLst>
               <a:ext uri="{FF2B5EF4-FFF2-40B4-BE49-F238E27FC236}">
-                <a16:creationId xmlns:a16="http://schemas.microsoft.com/office/drawing/2014/main" id="{563AEDAE-70A2-EDA6-D8D8-3AC925988512}"/>
+                <a16:creationId xmlns:a16="http://schemas.microsoft.com/office/drawing/2014/main" id="{3BED8B4B-12FB-DC30-B8FE-90F854A68678}"/>
               </a:ext>
             </a:extLst>
           </p:cNvPr>
@@ -1691,7 +1691,7 @@
           <p:cNvPr id="3" name="テキスト プレースホルダー 2">
             <a:extLst>
               <a:ext uri="{FF2B5EF4-FFF2-40B4-BE49-F238E27FC236}">
-                <a16:creationId xmlns:a16="http://schemas.microsoft.com/office/drawing/2014/main" id="{30C08DDC-0750-903E-BF84-945F94ECF005}"/>
+                <a16:creationId xmlns:a16="http://schemas.microsoft.com/office/drawing/2014/main" id="{2B748CDE-699F-66DB-6DF0-89C98A1A4333}"/>
               </a:ext>
             </a:extLst>
           </p:cNvPr>
@@ -1762,7 +1762,7 @@
           <p:cNvPr id="4" name="コンテンツ プレースホルダー 3">
             <a:extLst>
               <a:ext uri="{FF2B5EF4-FFF2-40B4-BE49-F238E27FC236}">
-                <a16:creationId xmlns:a16="http://schemas.microsoft.com/office/drawing/2014/main" id="{5B1AB897-0B13-B910-AD09-86431AC634EE}"/>
+                <a16:creationId xmlns:a16="http://schemas.microsoft.com/office/drawing/2014/main" id="{5BB7F60D-7868-7256-7FA9-3B4D99DB492A}"/>
               </a:ext>
             </a:extLst>
           </p:cNvPr>
@@ -1856,7 +1856,7 @@
           <p:cNvPr id="5" name="テキスト プレースホルダー 4">
             <a:extLst>
               <a:ext uri="{FF2B5EF4-FFF2-40B4-BE49-F238E27FC236}">
-                <a16:creationId xmlns:a16="http://schemas.microsoft.com/office/drawing/2014/main" id="{3D099D4F-EAB5-92F9-0988-7420EB9B2B34}"/>
+                <a16:creationId xmlns:a16="http://schemas.microsoft.com/office/drawing/2014/main" id="{655BA23C-2705-5386-4232-0E5051465C54}"/>
               </a:ext>
             </a:extLst>
           </p:cNvPr>
@@ -1927,7 +1927,7 @@
           <p:cNvPr id="6" name="コンテンツ プレースホルダー 5">
             <a:extLst>
               <a:ext uri="{FF2B5EF4-FFF2-40B4-BE49-F238E27FC236}">
-                <a16:creationId xmlns:a16="http://schemas.microsoft.com/office/drawing/2014/main" id="{8BE81D03-F953-B8E1-C03E-CFBAB7F8F0BA}"/>
+                <a16:creationId xmlns:a16="http://schemas.microsoft.com/office/drawing/2014/main" id="{CF81B053-354A-5658-59FB-3FEDCDC54E18}"/>
               </a:ext>
             </a:extLst>
           </p:cNvPr>
@@ -2021,7 +2021,7 @@
           <p:cNvPr id="7" name="日付プレースホルダー 6">
             <a:extLst>
               <a:ext uri="{FF2B5EF4-FFF2-40B4-BE49-F238E27FC236}">
-                <a16:creationId xmlns:a16="http://schemas.microsoft.com/office/drawing/2014/main" id="{1E8C35F6-ACD1-A4EF-4C16-E80BB14FE7E9}"/>
+                <a16:creationId xmlns:a16="http://schemas.microsoft.com/office/drawing/2014/main" id="{4E7DB976-7437-D5FB-4303-CB6B1621C5E3}"/>
               </a:ext>
             </a:extLst>
           </p:cNvPr>
@@ -2037,7 +2037,7 @@
           <a:bodyPr/>
           <a:lstStyle/>
           <a:p>
-            <a:fld id="{B4538FFC-6BF6-4B0F-8014-60B4912D1308}" type="datetimeFigureOut">
+            <a:fld id="{667C9F02-AC1C-45A8-AB6A-9852702887FF}" type="datetimeFigureOut">
               <a:rPr kumimoji="1" lang="ja-JP" altLang="en-US" smtClean="0"/>
               <a:t>2026/7/30</a:t>
             </a:fld>
@@ -2050,7 +2050,7 @@
           <p:cNvPr id="8" name="フッター プレースホルダー 7">
             <a:extLst>
               <a:ext uri="{FF2B5EF4-FFF2-40B4-BE49-F238E27FC236}">
-                <a16:creationId xmlns:a16="http://schemas.microsoft.com/office/drawing/2014/main" id="{E15547C2-7E61-4931-2A4E-B48C47425599}"/>
+                <a16:creationId xmlns:a16="http://schemas.microsoft.com/office/drawing/2014/main" id="{9DE40C3F-FFC7-B2A4-E3F1-04225D69FF7F}"/>
               </a:ext>
             </a:extLst>
           </p:cNvPr>
@@ -2075,7 +2075,7 @@
           <p:cNvPr id="9" name="スライド番号プレースホルダー 8">
             <a:extLst>
               <a:ext uri="{FF2B5EF4-FFF2-40B4-BE49-F238E27FC236}">
-                <a16:creationId xmlns:a16="http://schemas.microsoft.com/office/drawing/2014/main" id="{B554476F-2965-1CD2-19C6-EEAB61C8028E}"/>
+                <a16:creationId xmlns:a16="http://schemas.microsoft.com/office/drawing/2014/main" id="{B16A6392-0EBB-3AEB-31CB-DD75D2A2D691}"/>
               </a:ext>
             </a:extLst>
           </p:cNvPr>
@@ -2091,7 +2091,7 @@
           <a:bodyPr/>
           <a:lstStyle/>
           <a:p>
-            <a:fld id="{2B4D0C7B-E581-45B6-BF77-AB7BC2B8D965}" type="slidenum">
+            <a:fld id="{4C524E73-2C4E-46B2-AA0F-6A9A7CBB572F}" type="slidenum">
               <a:rPr kumimoji="1" lang="ja-JP" altLang="en-US" smtClean="0"/>
               <a:t>‹#›</a:t>
             </a:fld>
@@ -2102,7 +2102,7 @@
     </p:spTree>
     <p:extLst>
       <p:ext uri="{BB962C8B-B14F-4D97-AF65-F5344CB8AC3E}">
-        <p14:creationId xmlns:p14="http://schemas.microsoft.com/office/powerpoint/2010/main" val="4106168033"/>
+        <p14:creationId xmlns:p14="http://schemas.microsoft.com/office/powerpoint/2010/main" val="1654083827"/>
       </p:ext>
     </p:extLst>
   </p:cSld>
@@ -2134,7 +2134,7 @@
           <p:cNvPr id="2" name="タイトル 1">
             <a:extLst>
               <a:ext uri="{FF2B5EF4-FFF2-40B4-BE49-F238E27FC236}">
-                <a16:creationId xmlns:a16="http://schemas.microsoft.com/office/drawing/2014/main" id="{782E8F04-5D03-0D4D-25FD-B61303B11E94}"/>
+                <a16:creationId xmlns:a16="http://schemas.microsoft.com/office/drawing/2014/main" id="{DF165136-E91B-6559-C336-5C0E3F20829B}"/>
               </a:ext>
             </a:extLst>
           </p:cNvPr>
@@ -2162,7 +2162,7 @@
           <p:cNvPr id="3" name="日付プレースホルダー 2">
             <a:extLst>
               <a:ext uri="{FF2B5EF4-FFF2-40B4-BE49-F238E27FC236}">
-                <a16:creationId xmlns:a16="http://schemas.microsoft.com/office/drawing/2014/main" id="{9A884017-8A8D-6EBA-2D29-941FA1770049}"/>
+                <a16:creationId xmlns:a16="http://schemas.microsoft.com/office/drawing/2014/main" id="{AC526417-4473-CAB9-1E6A-796A2DCA91A5}"/>
               </a:ext>
             </a:extLst>
           </p:cNvPr>
@@ -2178,7 +2178,7 @@
           <a:bodyPr/>
           <a:lstStyle/>
           <a:p>
-            <a:fld id="{B4538FFC-6BF6-4B0F-8014-60B4912D1308}" type="datetimeFigureOut">
+            <a:fld id="{667C9F02-AC1C-45A8-AB6A-9852702887FF}" type="datetimeFigureOut">
               <a:rPr kumimoji="1" lang="ja-JP" altLang="en-US" smtClean="0"/>
               <a:t>2026/7/30</a:t>
             </a:fld>
@@ -2191,7 +2191,7 @@
           <p:cNvPr id="4" name="フッター プレースホルダー 3">
             <a:extLst>
               <a:ext uri="{FF2B5EF4-FFF2-40B4-BE49-F238E27FC236}">
-                <a16:creationId xmlns:a16="http://schemas.microsoft.com/office/drawing/2014/main" id="{DEA4CA73-EBB7-BD45-F670-0C8128C99167}"/>
+                <a16:creationId xmlns:a16="http://schemas.microsoft.com/office/drawing/2014/main" id="{25F197B1-CE06-786E-62F8-006716A60CAD}"/>
               </a:ext>
             </a:extLst>
           </p:cNvPr>
@@ -2216,7 +2216,7 @@
           <p:cNvPr id="5" name="スライド番号プレースホルダー 4">
             <a:extLst>
               <a:ext uri="{FF2B5EF4-FFF2-40B4-BE49-F238E27FC236}">
-                <a16:creationId xmlns:a16="http://schemas.microsoft.com/office/drawing/2014/main" id="{6705F855-0F70-28E1-18F1-0B02A04190C2}"/>
+                <a16:creationId xmlns:a16="http://schemas.microsoft.com/office/drawing/2014/main" id="{B38DAB53-C9F2-38B9-EB3B-6C856C6A0A34}"/>
               </a:ext>
             </a:extLst>
           </p:cNvPr>
@@ -2232,7 +2232,7 @@
           <a:bodyPr/>
           <a:lstStyle/>
           <a:p>
-            <a:fld id="{2B4D0C7B-E581-45B6-BF77-AB7BC2B8D965}" type="slidenum">
+            <a:fld id="{4C524E73-2C4E-46B2-AA0F-6A9A7CBB572F}" type="slidenum">
               <a:rPr kumimoji="1" lang="ja-JP" altLang="en-US" smtClean="0"/>
               <a:t>‹#›</a:t>
             </a:fld>
@@ -2243,7 +2243,7 @@
     </p:spTree>
     <p:extLst>
       <p:ext uri="{BB962C8B-B14F-4D97-AF65-F5344CB8AC3E}">
-        <p14:creationId xmlns:p14="http://schemas.microsoft.com/office/powerpoint/2010/main" val="926681235"/>
+        <p14:creationId xmlns:p14="http://schemas.microsoft.com/office/powerpoint/2010/main" val="4059139673"/>
       </p:ext>
     </p:extLst>
   </p:cSld>
@@ -2275,7 +2275,7 @@
           <p:cNvPr id="2" name="日付プレースホルダー 1">
             <a:extLst>
               <a:ext uri="{FF2B5EF4-FFF2-40B4-BE49-F238E27FC236}">
-                <a16:creationId xmlns:a16="http://schemas.microsoft.com/office/drawing/2014/main" id="{CFD6BD20-D89F-46E2-BC3E-E9889DDAFEDE}"/>
+                <a16:creationId xmlns:a16="http://schemas.microsoft.com/office/drawing/2014/main" id="{E8FAA3D0-3715-860F-C011-2968470B3A37}"/>
               </a:ext>
             </a:extLst>
           </p:cNvPr>
@@ -2291,7 +2291,7 @@
           <a:bodyPr/>
           <a:lstStyle/>
           <a:p>
-            <a:fld id="{B4538FFC-6BF6-4B0F-8014-60B4912D1308}" type="datetimeFigureOut">
+            <a:fld id="{667C9F02-AC1C-45A8-AB6A-9852702887FF}" type="datetimeFigureOut">
               <a:rPr kumimoji="1" lang="ja-JP" altLang="en-US" smtClean="0"/>
               <a:t>2026/7/30</a:t>
             </a:fld>
@@ -2304,7 +2304,7 @@
           <p:cNvPr id="3" name="フッター プレースホルダー 2">
             <a:extLst>
               <a:ext uri="{FF2B5EF4-FFF2-40B4-BE49-F238E27FC236}">
-                <a16:creationId xmlns:a16="http://schemas.microsoft.com/office/drawing/2014/main" id="{5D765F79-F90D-E0C0-1F1A-56D4E8A66EB5}"/>
+                <a16:creationId xmlns:a16="http://schemas.microsoft.com/office/drawing/2014/main" id="{82B4EB9F-9C7A-72A1-3601-098744704497}"/>
               </a:ext>
             </a:extLst>
           </p:cNvPr>
@@ -2329,7 +2329,7 @@
           <p:cNvPr id="4" name="スライド番号プレースホルダー 3">
             <a:extLst>
               <a:ext uri="{FF2B5EF4-FFF2-40B4-BE49-F238E27FC236}">
-                <a16:creationId xmlns:a16="http://schemas.microsoft.com/office/drawing/2014/main" id="{28F166BB-BAA0-B0AC-B0BF-BEF40B60BCE0}"/>
+                <a16:creationId xmlns:a16="http://schemas.microsoft.com/office/drawing/2014/main" id="{B9714C42-E775-C0FA-588F-6CE1C09362D1}"/>
               </a:ext>
             </a:extLst>
           </p:cNvPr>
@@ -2345,7 +2345,7 @@
           <a:bodyPr/>
           <a:lstStyle/>
           <a:p>
-            <a:fld id="{2B4D0C7B-E581-45B6-BF77-AB7BC2B8D965}" type="slidenum">
+            <a:fld id="{4C524E73-2C4E-46B2-AA0F-6A9A7CBB572F}" type="slidenum">
               <a:rPr kumimoji="1" lang="ja-JP" altLang="en-US" smtClean="0"/>
               <a:t>‹#›</a:t>
             </a:fld>
@@ -2356,7 +2356,7 @@
     </p:spTree>
     <p:extLst>
       <p:ext uri="{BB962C8B-B14F-4D97-AF65-F5344CB8AC3E}">
-        <p14:creationId xmlns:p14="http://schemas.microsoft.com/office/powerpoint/2010/main" val="1304476940"/>
+        <p14:creationId xmlns:p14="http://schemas.microsoft.com/office/powerpoint/2010/main" val="1244717693"/>
       </p:ext>
     </p:extLst>
   </p:cSld>
@@ -2388,7 +2388,7 @@
           <p:cNvPr id="2" name="タイトル 1">
             <a:extLst>
               <a:ext uri="{FF2B5EF4-FFF2-40B4-BE49-F238E27FC236}">
-                <a16:creationId xmlns:a16="http://schemas.microsoft.com/office/drawing/2014/main" id="{6A503D7C-ADCA-EDB2-8D3D-267123882D96}"/>
+                <a16:creationId xmlns:a16="http://schemas.microsoft.com/office/drawing/2014/main" id="{9D97DA8A-6046-1B3C-642B-61896375408C}"/>
               </a:ext>
             </a:extLst>
           </p:cNvPr>
@@ -2425,7 +2425,7 @@
           <p:cNvPr id="3" name="コンテンツ プレースホルダー 2">
             <a:extLst>
               <a:ext uri="{FF2B5EF4-FFF2-40B4-BE49-F238E27FC236}">
-                <a16:creationId xmlns:a16="http://schemas.microsoft.com/office/drawing/2014/main" id="{27803C5F-3909-B2FE-E333-BDED778FB4E8}"/>
+                <a16:creationId xmlns:a16="http://schemas.microsoft.com/office/drawing/2014/main" id="{EAFDFD7B-DA80-98F0-31A0-914078DFD794}"/>
               </a:ext>
             </a:extLst>
           </p:cNvPr>
@@ -2547,7 +2547,7 @@
           <p:cNvPr id="4" name="テキスト プレースホルダー 3">
             <a:extLst>
               <a:ext uri="{FF2B5EF4-FFF2-40B4-BE49-F238E27FC236}">
-                <a16:creationId xmlns:a16="http://schemas.microsoft.com/office/drawing/2014/main" id="{F663E44B-234D-F541-B6DF-75B2F3235959}"/>
+                <a16:creationId xmlns:a16="http://schemas.microsoft.com/office/drawing/2014/main" id="{228A1A56-C19B-3705-43C0-3ADFBC1A837D}"/>
               </a:ext>
             </a:extLst>
           </p:cNvPr>
@@ -2618,7 +2618,7 @@
           <p:cNvPr id="5" name="日付プレースホルダー 4">
             <a:extLst>
               <a:ext uri="{FF2B5EF4-FFF2-40B4-BE49-F238E27FC236}">
-                <a16:creationId xmlns:a16="http://schemas.microsoft.com/office/drawing/2014/main" id="{40D0730B-50CA-F89B-0FE5-276312285BCA}"/>
+                <a16:creationId xmlns:a16="http://schemas.microsoft.com/office/drawing/2014/main" id="{712F6C95-8AC9-70EE-E6AE-8680D6BCFF01}"/>
               </a:ext>
             </a:extLst>
           </p:cNvPr>
@@ -2634,7 +2634,7 @@
           <a:bodyPr/>
           <a:lstStyle/>
           <a:p>
-            <a:fld id="{B4538FFC-6BF6-4B0F-8014-60B4912D1308}" type="datetimeFigureOut">
+            <a:fld id="{667C9F02-AC1C-45A8-AB6A-9852702887FF}" type="datetimeFigureOut">
               <a:rPr kumimoji="1" lang="ja-JP" altLang="en-US" smtClean="0"/>
               <a:t>2026/7/30</a:t>
             </a:fld>
@@ -2647,7 +2647,7 @@
           <p:cNvPr id="6" name="フッター プレースホルダー 5">
             <a:extLst>
               <a:ext uri="{FF2B5EF4-FFF2-40B4-BE49-F238E27FC236}">
-                <a16:creationId xmlns:a16="http://schemas.microsoft.com/office/drawing/2014/main" id="{DBB7D2CB-6C6E-EDFB-6EF0-03DF75C3E1E4}"/>
+                <a16:creationId xmlns:a16="http://schemas.microsoft.com/office/drawing/2014/main" id="{2BE2BD2B-0C53-A93E-123A-E27EF66CBA8E}"/>
               </a:ext>
             </a:extLst>
           </p:cNvPr>
@@ -2672,7 +2672,7 @@
           <p:cNvPr id="7" name="スライド番号プレースホルダー 6">
             <a:extLst>
               <a:ext uri="{FF2B5EF4-FFF2-40B4-BE49-F238E27FC236}">
-                <a16:creationId xmlns:a16="http://schemas.microsoft.com/office/drawing/2014/main" id="{C4AEC01A-F5F7-42E2-AD9F-881CDDB8758A}"/>
+                <a16:creationId xmlns:a16="http://schemas.microsoft.com/office/drawing/2014/main" id="{71AE8822-128A-0A60-6EF3-FF58688650A6}"/>
               </a:ext>
             </a:extLst>
           </p:cNvPr>
@@ -2688,7 +2688,7 @@
           <a:bodyPr/>
           <a:lstStyle/>
           <a:p>
-            <a:fld id="{2B4D0C7B-E581-45B6-BF77-AB7BC2B8D965}" type="slidenum">
+            <a:fld id="{4C524E73-2C4E-46B2-AA0F-6A9A7CBB572F}" type="slidenum">
               <a:rPr kumimoji="1" lang="ja-JP" altLang="en-US" smtClean="0"/>
               <a:t>‹#›</a:t>
             </a:fld>
@@ -2699,7 +2699,7 @@
     </p:spTree>
     <p:extLst>
       <p:ext uri="{BB962C8B-B14F-4D97-AF65-F5344CB8AC3E}">
-        <p14:creationId xmlns:p14="http://schemas.microsoft.com/office/powerpoint/2010/main" val="1806578142"/>
+        <p14:creationId xmlns:p14="http://schemas.microsoft.com/office/powerpoint/2010/main" val="1920281497"/>
       </p:ext>
     </p:extLst>
   </p:cSld>
@@ -2731,7 +2731,7 @@
           <p:cNvPr id="2" name="タイトル 1">
             <a:extLst>
               <a:ext uri="{FF2B5EF4-FFF2-40B4-BE49-F238E27FC236}">
-                <a16:creationId xmlns:a16="http://schemas.microsoft.com/office/drawing/2014/main" id="{93D9411C-45A4-4D2B-3550-55D41FD0BE41}"/>
+                <a16:creationId xmlns:a16="http://schemas.microsoft.com/office/drawing/2014/main" id="{F5160B51-20F8-13D9-D962-35D4FD8B8714}"/>
               </a:ext>
             </a:extLst>
           </p:cNvPr>
@@ -2768,7 +2768,7 @@
           <p:cNvPr id="3" name="図プレースホルダー 2">
             <a:extLst>
               <a:ext uri="{FF2B5EF4-FFF2-40B4-BE49-F238E27FC236}">
-                <a16:creationId xmlns:a16="http://schemas.microsoft.com/office/drawing/2014/main" id="{898C4726-B8D7-8342-7D5C-56E974151420}"/>
+                <a16:creationId xmlns:a16="http://schemas.microsoft.com/office/drawing/2014/main" id="{CE6BBAED-2727-6B6C-F7BA-FFF437020DD7}"/>
               </a:ext>
             </a:extLst>
           </p:cNvPr>
@@ -2835,7 +2835,7 @@
           <p:cNvPr id="4" name="テキスト プレースホルダー 3">
             <a:extLst>
               <a:ext uri="{FF2B5EF4-FFF2-40B4-BE49-F238E27FC236}">
-                <a16:creationId xmlns:a16="http://schemas.microsoft.com/office/drawing/2014/main" id="{0946AB7D-626C-9B1C-4D87-C90504073193}"/>
+                <a16:creationId xmlns:a16="http://schemas.microsoft.com/office/drawing/2014/main" id="{59833329-171F-664F-60DB-D828C46696B6}"/>
               </a:ext>
             </a:extLst>
           </p:cNvPr>
@@ -2906,7 +2906,7 @@
           <p:cNvPr id="5" name="日付プレースホルダー 4">
             <a:extLst>
               <a:ext uri="{FF2B5EF4-FFF2-40B4-BE49-F238E27FC236}">
-                <a16:creationId xmlns:a16="http://schemas.microsoft.com/office/drawing/2014/main" id="{54A89866-EB3D-1F33-B053-99D6A8BEA7D4}"/>
+                <a16:creationId xmlns:a16="http://schemas.microsoft.com/office/drawing/2014/main" id="{D9244C63-DB36-D0B9-EA11-E1B429DDFCC2}"/>
               </a:ext>
             </a:extLst>
           </p:cNvPr>
@@ -2922,7 +2922,7 @@
           <a:bodyPr/>
           <a:lstStyle/>
           <a:p>
-            <a:fld id="{B4538FFC-6BF6-4B0F-8014-60B4912D1308}" type="datetimeFigureOut">
+            <a:fld id="{667C9F02-AC1C-45A8-AB6A-9852702887FF}" type="datetimeFigureOut">
               <a:rPr kumimoji="1" lang="ja-JP" altLang="en-US" smtClean="0"/>
               <a:t>2026/7/30</a:t>
             </a:fld>
@@ -2935,7 +2935,7 @@
           <p:cNvPr id="6" name="フッター プレースホルダー 5">
             <a:extLst>
               <a:ext uri="{FF2B5EF4-FFF2-40B4-BE49-F238E27FC236}">
-                <a16:creationId xmlns:a16="http://schemas.microsoft.com/office/drawing/2014/main" id="{B1B653AD-8CDE-F2AF-79F3-1A1A7CD7A3C9}"/>
+                <a16:creationId xmlns:a16="http://schemas.microsoft.com/office/drawing/2014/main" id="{20D55AF6-5DA0-C89E-79EA-C5BEE9F8D412}"/>
               </a:ext>
             </a:extLst>
           </p:cNvPr>
@@ -2960,7 +2960,7 @@
           <p:cNvPr id="7" name="スライド番号プレースホルダー 6">
             <a:extLst>
               <a:ext uri="{FF2B5EF4-FFF2-40B4-BE49-F238E27FC236}">
-                <a16:creationId xmlns:a16="http://schemas.microsoft.com/office/drawing/2014/main" id="{461DCC39-ABB8-340D-E227-64ED98527534}"/>
+                <a16:creationId xmlns:a16="http://schemas.microsoft.com/office/drawing/2014/main" id="{AD124F0C-0F5A-78D2-751C-09BF3C925A47}"/>
               </a:ext>
             </a:extLst>
           </p:cNvPr>
@@ -2976,7 +2976,7 @@
           <a:bodyPr/>
           <a:lstStyle/>
           <a:p>
-            <a:fld id="{2B4D0C7B-E581-45B6-BF77-AB7BC2B8D965}" type="slidenum">
+            <a:fld id="{4C524E73-2C4E-46B2-AA0F-6A9A7CBB572F}" type="slidenum">
               <a:rPr kumimoji="1" lang="ja-JP" altLang="en-US" smtClean="0"/>
               <a:t>‹#›</a:t>
             </a:fld>
@@ -2987,7 +2987,7 @@
     </p:spTree>
     <p:extLst>
       <p:ext uri="{BB962C8B-B14F-4D97-AF65-F5344CB8AC3E}">
-        <p14:creationId xmlns:p14="http://schemas.microsoft.com/office/powerpoint/2010/main" val="1301738924"/>
+        <p14:creationId xmlns:p14="http://schemas.microsoft.com/office/powerpoint/2010/main" val="3371302529"/>
       </p:ext>
     </p:extLst>
   </p:cSld>
@@ -3024,7 +3024,7 @@
           <p:cNvPr id="2" name="タイトル プレースホルダー 1">
             <a:extLst>
               <a:ext uri="{FF2B5EF4-FFF2-40B4-BE49-F238E27FC236}">
-                <a16:creationId xmlns:a16="http://schemas.microsoft.com/office/drawing/2014/main" id="{418AA08E-469C-4251-529F-B6ECFE0F292A}"/>
+                <a16:creationId xmlns:a16="http://schemas.microsoft.com/office/drawing/2014/main" id="{D4F758AE-7213-E1EA-B9B1-DF5F2511C944}"/>
               </a:ext>
             </a:extLst>
           </p:cNvPr>
@@ -3062,7 +3062,7 @@
           <p:cNvPr id="3" name="テキスト プレースホルダー 2">
             <a:extLst>
               <a:ext uri="{FF2B5EF4-FFF2-40B4-BE49-F238E27FC236}">
-                <a16:creationId xmlns:a16="http://schemas.microsoft.com/office/drawing/2014/main" id="{97315226-1585-9A77-81AC-F162C82D981E}"/>
+                <a16:creationId xmlns:a16="http://schemas.microsoft.com/office/drawing/2014/main" id="{30E53E14-0BF6-6A96-B936-74F4ADEBF60C}"/>
               </a:ext>
             </a:extLst>
           </p:cNvPr>
@@ -3161,7 +3161,7 @@
           <p:cNvPr id="4" name="日付プレースホルダー 3">
             <a:extLst>
               <a:ext uri="{FF2B5EF4-FFF2-40B4-BE49-F238E27FC236}">
-                <a16:creationId xmlns:a16="http://schemas.microsoft.com/office/drawing/2014/main" id="{DDC0BF54-DEFE-3B1F-0A2B-9D98C70C7406}"/>
+                <a16:creationId xmlns:a16="http://schemas.microsoft.com/office/drawing/2014/main" id="{75316CC5-B8BB-93C5-5688-8D9793723C4E}"/>
               </a:ext>
             </a:extLst>
           </p:cNvPr>
@@ -3195,7 +3195,7 @@
             </a:lvl1pPr>
           </a:lstStyle>
           <a:p>
-            <a:fld id="{B4538FFC-6BF6-4B0F-8014-60B4912D1308}" type="datetimeFigureOut">
+            <a:fld id="{667C9F02-AC1C-45A8-AB6A-9852702887FF}" type="datetimeFigureOut">
               <a:rPr kumimoji="1" lang="ja-JP" altLang="en-US" smtClean="0"/>
               <a:t>2026/7/30</a:t>
             </a:fld>
@@ -3208,7 +3208,7 @@
           <p:cNvPr id="5" name="フッター プレースホルダー 4">
             <a:extLst>
               <a:ext uri="{FF2B5EF4-FFF2-40B4-BE49-F238E27FC236}">
-                <a16:creationId xmlns:a16="http://schemas.microsoft.com/office/drawing/2014/main" id="{88B7F004-58FD-6696-4A47-3B886CFC0B61}"/>
+                <a16:creationId xmlns:a16="http://schemas.microsoft.com/office/drawing/2014/main" id="{CBA47849-41A7-9DAC-EB1D-BDEBA24BA07D}"/>
               </a:ext>
             </a:extLst>
           </p:cNvPr>
@@ -3251,7 +3251,7 @@
           <p:cNvPr id="6" name="スライド番号プレースホルダー 5">
             <a:extLst>
               <a:ext uri="{FF2B5EF4-FFF2-40B4-BE49-F238E27FC236}">
-                <a16:creationId xmlns:a16="http://schemas.microsoft.com/office/drawing/2014/main" id="{750AF129-1F76-2BDD-CD36-7C18F57BA2CE}"/>
+                <a16:creationId xmlns:a16="http://schemas.microsoft.com/office/drawing/2014/main" id="{518FE396-E76B-1FB2-BA4B-2F4EBBBEAEBC}"/>
               </a:ext>
             </a:extLst>
           </p:cNvPr>
@@ -3285,7 +3285,7 @@
             </a:lvl1pPr>
           </a:lstStyle>
           <a:p>
-            <a:fld id="{2B4D0C7B-E581-45B6-BF77-AB7BC2B8D965}" type="slidenum">
+            <a:fld id="{4C524E73-2C4E-46B2-AA0F-6A9A7CBB572F}" type="slidenum">
               <a:rPr kumimoji="1" lang="ja-JP" altLang="en-US" smtClean="0"/>
               <a:t>‹#›</a:t>
             </a:fld>
@@ -3296,7 +3296,7 @@
     </p:spTree>
     <p:extLst>
       <p:ext uri="{BB962C8B-B14F-4D97-AF65-F5344CB8AC3E}">
-        <p14:creationId xmlns:p14="http://schemas.microsoft.com/office/powerpoint/2010/main" val="1836654428"/>
+        <p14:creationId xmlns:p14="http://schemas.microsoft.com/office/powerpoint/2010/main" val="1986436447"/>
       </p:ext>
     </p:extLst>
   </p:cSld>
@@ -3619,7 +3619,7 @@
           <p:cNvPr id="2" name="テキスト ボックス 1">
             <a:extLst>
               <a:ext uri="{FF2B5EF4-FFF2-40B4-BE49-F238E27FC236}">
-                <a16:creationId xmlns:a16="http://schemas.microsoft.com/office/drawing/2014/main" id="{12BD1FF6-D8EC-04AC-EBCF-C09B0C1B3F0C}"/>
+                <a16:creationId xmlns:a16="http://schemas.microsoft.com/office/drawing/2014/main" id="{F22735CD-0628-9D34-4F93-89D1BF1BE590}"/>
               </a:ext>
             </a:extLst>
           </p:cNvPr>
@@ -3665,7 +3665,7 @@
           <p:cNvPr id="3" name="テキスト ボックス 2">
             <a:extLst>
               <a:ext uri="{FF2B5EF4-FFF2-40B4-BE49-F238E27FC236}">
-                <a16:creationId xmlns:a16="http://schemas.microsoft.com/office/drawing/2014/main" id="{C2851A84-D42E-BFDC-5273-C93439468861}"/>
+                <a16:creationId xmlns:a16="http://schemas.microsoft.com/office/drawing/2014/main" id="{6CD5921B-5762-EA30-B370-86B0CF99AC6F}"/>
               </a:ext>
             </a:extLst>
           </p:cNvPr>
@@ -3714,7 +3714,7 @@
           <p:cNvPr id="4" name="テキスト ボックス 3">
             <a:extLst>
               <a:ext uri="{FF2B5EF4-FFF2-40B4-BE49-F238E27FC236}">
-                <a16:creationId xmlns:a16="http://schemas.microsoft.com/office/drawing/2014/main" id="{11DC2A74-CF5D-8132-6954-E3FCD4892DB1}"/>
+                <a16:creationId xmlns:a16="http://schemas.microsoft.com/office/drawing/2014/main" id="{63A6F295-6E70-ABE4-6976-EBC259B31613}"/>
               </a:ext>
             </a:extLst>
           </p:cNvPr>
@@ -3754,7 +3754,7 @@
           <p:cNvPr id="5" name="テキスト ボックス 4">
             <a:extLst>
               <a:ext uri="{FF2B5EF4-FFF2-40B4-BE49-F238E27FC236}">
-                <a16:creationId xmlns:a16="http://schemas.microsoft.com/office/drawing/2014/main" id="{49FEBF1E-CEC0-192E-792A-85138FFF5BC8}"/>
+                <a16:creationId xmlns:a16="http://schemas.microsoft.com/office/drawing/2014/main" id="{803FF4CE-D5D6-0704-68E7-D113E4BF6732}"/>
               </a:ext>
             </a:extLst>
           </p:cNvPr>
@@ -3801,7 +3801,7 @@
             <a:hlinkClick r:id="" action="ppaction://media"/>
             <a:extLst>
               <a:ext uri="{FF2B5EF4-FFF2-40B4-BE49-F238E27FC236}">
-                <a16:creationId xmlns:a16="http://schemas.microsoft.com/office/drawing/2014/main" id="{3E043CFA-8C3D-15AB-07F6-22B7A3179EA4}"/>
+                <a16:creationId xmlns:a16="http://schemas.microsoft.com/office/drawing/2014/main" id="{BB972C7E-116B-D056-C87D-653C910DBB04}"/>
               </a:ext>
             </a:extLst>
           </p:cNvPr>
@@ -3836,7 +3836,7 @@
     </p:spTree>
     <p:extLst>
       <p:ext uri="{BB962C8B-B14F-4D97-AF65-F5344CB8AC3E}">
-        <p14:creationId xmlns:p14="http://schemas.microsoft.com/office/powerpoint/2010/main" val="1059161220"/>
+        <p14:creationId xmlns:p14="http://schemas.microsoft.com/office/powerpoint/2010/main" val="2790390605"/>
       </p:ext>
     </p:extLst>
   </p:cSld>
@@ -3960,7 +3960,7 @@
           <p:cNvPr id="2" name="テキスト ボックス 1">
             <a:extLst>
               <a:ext uri="{FF2B5EF4-FFF2-40B4-BE49-F238E27FC236}">
-                <a16:creationId xmlns:a16="http://schemas.microsoft.com/office/drawing/2014/main" id="{5E7DDF22-4736-CA50-9E76-D00DDD874961}"/>
+                <a16:creationId xmlns:a16="http://schemas.microsoft.com/office/drawing/2014/main" id="{22FC4382-90CF-B9FE-1076-EFCA0B56CB4B}"/>
               </a:ext>
             </a:extLst>
           </p:cNvPr>
@@ -4006,7 +4006,7 @@
           <p:cNvPr id="3" name="テキスト ボックス 2">
             <a:extLst>
               <a:ext uri="{FF2B5EF4-FFF2-40B4-BE49-F238E27FC236}">
-                <a16:creationId xmlns:a16="http://schemas.microsoft.com/office/drawing/2014/main" id="{968265E2-1124-D352-9065-B47314338D01}"/>
+                <a16:creationId xmlns:a16="http://schemas.microsoft.com/office/drawing/2014/main" id="{4BAFDAE1-DD91-BCBA-B0A2-815B4296128B}"/>
               </a:ext>
             </a:extLst>
           </p:cNvPr>
@@ -4046,7 +4046,7 @@
           <p:cNvPr id="4" name="テキスト ボックス 3">
             <a:extLst>
               <a:ext uri="{FF2B5EF4-FFF2-40B4-BE49-F238E27FC236}">
-                <a16:creationId xmlns:a16="http://schemas.microsoft.com/office/drawing/2014/main" id="{5CAA89C2-D21B-69F0-3FAF-F66CA34BFDC9}"/>
+                <a16:creationId xmlns:a16="http://schemas.microsoft.com/office/drawing/2014/main" id="{D90531B0-D642-E7EE-096B-0A22BB536015}"/>
               </a:ext>
             </a:extLst>
           </p:cNvPr>
@@ -4076,14 +4076,17 @@
                 </a:solidFill>
                 <a:latin typeface="Arial" panose="020B0604020202020204" pitchFamily="34" charset="0"/>
               </a:rPr>
-              <a:t>This is a Next</a:t>
-            </a:r>
-            <a:endParaRPr kumimoji="1" lang="ja-JP" altLang="en-US" sz="2000">
-              <a:solidFill>
-                <a:srgbClr val="333333"/>
-              </a:solidFill>
-              <a:latin typeface="Arial" panose="020B0604020202020204" pitchFamily="34" charset="0"/>
-            </a:endParaRPr>
+              <a:t>Gemecard Portal</a:t>
+            </a:r>
+            <a:r>
+              <a:rPr kumimoji="1" lang="ja-JP" altLang="en-US" sz="2000">
+                <a:solidFill>
+                  <a:srgbClr val="333333"/>
+                </a:solidFill>
+                <a:latin typeface="Arial" panose="020B0604020202020204" pitchFamily="34" charset="0"/>
+              </a:rPr>
+              <a:t>の目的、構成、実装を公開コードから確認できるプロジェクトです。</a:t>
+            </a:r>
           </a:p>
         </p:txBody>
       </p:sp>
@@ -4092,7 +4095,7 @@
           <p:cNvPr id="5" name="テキスト ボックス 4">
             <a:extLst>
               <a:ext uri="{FF2B5EF4-FFF2-40B4-BE49-F238E27FC236}">
-                <a16:creationId xmlns:a16="http://schemas.microsoft.com/office/drawing/2014/main" id="{3FA1D859-ABA2-BB49-F527-0F87495CCB3D}"/>
+                <a16:creationId xmlns:a16="http://schemas.microsoft.com/office/drawing/2014/main" id="{B4073614-2214-CF9F-8A3D-53A0F5FD6BA1}"/>
               </a:ext>
             </a:extLst>
           </p:cNvPr>
@@ -4139,7 +4142,7 @@
             <a:hlinkClick r:id="" action="ppaction://media"/>
             <a:extLst>
               <a:ext uri="{FF2B5EF4-FFF2-40B4-BE49-F238E27FC236}">
-                <a16:creationId xmlns:a16="http://schemas.microsoft.com/office/drawing/2014/main" id="{1F99EB57-2556-4F27-7FB1-520AD2AD3368}"/>
+                <a16:creationId xmlns:a16="http://schemas.microsoft.com/office/drawing/2014/main" id="{D80EE4F2-DACE-0E8E-72D7-830AABCC6C01}"/>
               </a:ext>
             </a:extLst>
           </p:cNvPr>
@@ -4174,7 +4177,7 @@
     </p:spTree>
     <p:extLst>
       <p:ext uri="{BB962C8B-B14F-4D97-AF65-F5344CB8AC3E}">
-        <p14:creationId xmlns:p14="http://schemas.microsoft.com/office/powerpoint/2010/main" val="368253913"/>
+        <p14:creationId xmlns:p14="http://schemas.microsoft.com/office/powerpoint/2010/main" val="857596035"/>
       </p:ext>
     </p:extLst>
   </p:cSld>
@@ -4183,10 +4186,10 @@
   </p:clrMapOvr>
   <mc:AlternateContent xmlns:mc="http://schemas.openxmlformats.org/markup-compatibility/2006">
     <mc:Choice xmlns:p14="http://schemas.microsoft.com/office/powerpoint/2010/main" Requires="p14">
-      <p:transition spd="slow" p14:dur="2000" advTm="5000"/>
+      <p:transition spd="slow" p14:dur="2000" advTm="8000"/>
     </mc:Choice>
     <mc:Fallback>
-      <p:transition spd="slow" advTm="5000"/>
+      <p:transition spd="slow" advTm="8000"/>
     </mc:Fallback>
   </mc:AlternateContent>
   <p:timing>
@@ -4217,7 +4220,7 @@
                                   <p:childTnLst>
                                     <p:cmd type="call" cmd="playFrom(0.0)">
                                       <p:cBhvr>
-                                        <p:cTn id="6" dur="2148" fill="hold"/>
+                                        <p:cTn id="6" dur="7341" fill="hold"/>
                                         <p:tgtEl>
                                           <p:spTgt spid="6"/>
                                         </p:tgtEl>
@@ -4298,7 +4301,7 @@
           <p:cNvPr id="2" name="テキスト ボックス 1">
             <a:extLst>
               <a:ext uri="{FF2B5EF4-FFF2-40B4-BE49-F238E27FC236}">
-                <a16:creationId xmlns:a16="http://schemas.microsoft.com/office/drawing/2014/main" id="{A089D02A-D9E7-D293-ADB8-2C472670294B}"/>
+                <a16:creationId xmlns:a16="http://schemas.microsoft.com/office/drawing/2014/main" id="{2A1D6992-13EF-68D3-B2D1-88BA0DCBF40D}"/>
               </a:ext>
             </a:extLst>
           </p:cNvPr>
@@ -4344,7 +4347,7 @@
           <p:cNvPr id="3" name="テキスト ボックス 2">
             <a:extLst>
               <a:ext uri="{FF2B5EF4-FFF2-40B4-BE49-F238E27FC236}">
-                <a16:creationId xmlns:a16="http://schemas.microsoft.com/office/drawing/2014/main" id="{2E0444DC-9A96-6864-A032-620DD7A44608}"/>
+                <a16:creationId xmlns:a16="http://schemas.microsoft.com/office/drawing/2014/main" id="{40B48C6B-7D23-172B-DE79-0AE79C017E7D}"/>
               </a:ext>
             </a:extLst>
           </p:cNvPr>
@@ -4384,7 +4387,7 @@
           <p:cNvPr id="4" name="テキスト ボックス 3">
             <a:extLst>
               <a:ext uri="{FF2B5EF4-FFF2-40B4-BE49-F238E27FC236}">
-                <a16:creationId xmlns:a16="http://schemas.microsoft.com/office/drawing/2014/main" id="{AA3218DA-B262-F47A-AC52-DE77C020CF8A}"/>
+                <a16:creationId xmlns:a16="http://schemas.microsoft.com/office/drawing/2014/main" id="{39D86690-7C64-F0E9-CD12-D8007304FD3B}"/>
               </a:ext>
             </a:extLst>
           </p:cNvPr>
@@ -4479,7 +4482,7 @@
           <p:cNvPr id="5" name="テキスト ボックス 4">
             <a:extLst>
               <a:ext uri="{FF2B5EF4-FFF2-40B4-BE49-F238E27FC236}">
-                <a16:creationId xmlns:a16="http://schemas.microsoft.com/office/drawing/2014/main" id="{8C400E8A-30C7-845C-ADE0-67CB15723A7C}"/>
+                <a16:creationId xmlns:a16="http://schemas.microsoft.com/office/drawing/2014/main" id="{A8A75452-EC99-78A1-4AD4-4FDFCA85487B}"/>
               </a:ext>
             </a:extLst>
           </p:cNvPr>
@@ -4526,7 +4529,7 @@
             <a:hlinkClick r:id="" action="ppaction://media"/>
             <a:extLst>
               <a:ext uri="{FF2B5EF4-FFF2-40B4-BE49-F238E27FC236}">
-                <a16:creationId xmlns:a16="http://schemas.microsoft.com/office/drawing/2014/main" id="{D3CCDCE3-9B47-ADEC-4EBF-705D70982B69}"/>
+                <a16:creationId xmlns:a16="http://schemas.microsoft.com/office/drawing/2014/main" id="{66DA033F-DF07-3951-3639-81CF25E293DD}"/>
               </a:ext>
             </a:extLst>
           </p:cNvPr>
@@ -4561,7 +4564,7 @@
     </p:spTree>
     <p:extLst>
       <p:ext uri="{BB962C8B-B14F-4D97-AF65-F5344CB8AC3E}">
-        <p14:creationId xmlns:p14="http://schemas.microsoft.com/office/powerpoint/2010/main" val="2706120823"/>
+        <p14:creationId xmlns:p14="http://schemas.microsoft.com/office/powerpoint/2010/main" val="4219872010"/>
       </p:ext>
     </p:extLst>
   </p:cSld>
@@ -4685,7 +4688,7 @@
           <p:cNvPr id="2" name="テキスト ボックス 1">
             <a:extLst>
               <a:ext uri="{FF2B5EF4-FFF2-40B4-BE49-F238E27FC236}">
-                <a16:creationId xmlns:a16="http://schemas.microsoft.com/office/drawing/2014/main" id="{23E133FA-A75F-38CE-4AF3-D8F86BB76722}"/>
+                <a16:creationId xmlns:a16="http://schemas.microsoft.com/office/drawing/2014/main" id="{0D726B49-5E32-D24B-6F26-80370B3C1C47}"/>
               </a:ext>
             </a:extLst>
           </p:cNvPr>
@@ -4731,7 +4734,7 @@
           <p:cNvPr id="3" name="テキスト ボックス 2">
             <a:extLst>
               <a:ext uri="{FF2B5EF4-FFF2-40B4-BE49-F238E27FC236}">
-                <a16:creationId xmlns:a16="http://schemas.microsoft.com/office/drawing/2014/main" id="{5B21F77A-CEDA-66E3-10E9-F27162D183C5}"/>
+                <a16:creationId xmlns:a16="http://schemas.microsoft.com/office/drawing/2014/main" id="{823F16F8-8917-0A32-A853-8E22DF61251B}"/>
               </a:ext>
             </a:extLst>
           </p:cNvPr>
@@ -4771,7 +4774,7 @@
           <p:cNvPr id="4" name="テキスト ボックス 3">
             <a:extLst>
               <a:ext uri="{FF2B5EF4-FFF2-40B4-BE49-F238E27FC236}">
-                <a16:creationId xmlns:a16="http://schemas.microsoft.com/office/drawing/2014/main" id="{1D03595A-F65B-D126-6D79-7428EE784249}"/>
+                <a16:creationId xmlns:a16="http://schemas.microsoft.com/office/drawing/2014/main" id="{3F2CE47C-332B-3D67-E221-039BCE71BCB4}"/>
               </a:ext>
             </a:extLst>
           </p:cNvPr>
@@ -4881,7 +4884,7 @@
           <p:cNvPr id="5" name="テキスト ボックス 4">
             <a:extLst>
               <a:ext uri="{FF2B5EF4-FFF2-40B4-BE49-F238E27FC236}">
-                <a16:creationId xmlns:a16="http://schemas.microsoft.com/office/drawing/2014/main" id="{A24B09B6-881A-2307-B763-250CF9B236EA}"/>
+                <a16:creationId xmlns:a16="http://schemas.microsoft.com/office/drawing/2014/main" id="{15EC5554-8150-5646-9A98-E9E8F8C379A4}"/>
               </a:ext>
             </a:extLst>
           </p:cNvPr>
@@ -4928,7 +4931,7 @@
             <a:hlinkClick r:id="" action="ppaction://media"/>
             <a:extLst>
               <a:ext uri="{FF2B5EF4-FFF2-40B4-BE49-F238E27FC236}">
-                <a16:creationId xmlns:a16="http://schemas.microsoft.com/office/drawing/2014/main" id="{C3CC8F8D-0718-80F6-3F90-A8008FACFD56}"/>
+                <a16:creationId xmlns:a16="http://schemas.microsoft.com/office/drawing/2014/main" id="{A19AD277-2CB5-AF08-62CD-84AC3DD26B66}"/>
               </a:ext>
             </a:extLst>
           </p:cNvPr>
@@ -4963,7 +4966,7 @@
     </p:spTree>
     <p:extLst>
       <p:ext uri="{BB962C8B-B14F-4D97-AF65-F5344CB8AC3E}">
-        <p14:creationId xmlns:p14="http://schemas.microsoft.com/office/powerpoint/2010/main" val="4056548407"/>
+        <p14:creationId xmlns:p14="http://schemas.microsoft.com/office/powerpoint/2010/main" val="2291389148"/>
       </p:ext>
     </p:extLst>
   </p:cSld>
@@ -5087,7 +5090,7 @@
           <p:cNvPr id="2" name="テキスト ボックス 1">
             <a:extLst>
               <a:ext uri="{FF2B5EF4-FFF2-40B4-BE49-F238E27FC236}">
-                <a16:creationId xmlns:a16="http://schemas.microsoft.com/office/drawing/2014/main" id="{8BB78A6A-B77D-FFB3-601D-3FD4CC07CD80}"/>
+                <a16:creationId xmlns:a16="http://schemas.microsoft.com/office/drawing/2014/main" id="{A629F56E-CA46-FFC7-AC94-49F1762F253B}"/>
               </a:ext>
             </a:extLst>
           </p:cNvPr>
@@ -5133,7 +5136,7 @@
           <p:cNvPr id="3" name="テキスト ボックス 2">
             <a:extLst>
               <a:ext uri="{FF2B5EF4-FFF2-40B4-BE49-F238E27FC236}">
-                <a16:creationId xmlns:a16="http://schemas.microsoft.com/office/drawing/2014/main" id="{30CC4934-742B-5A70-5B4E-B7D5B0C67277}"/>
+                <a16:creationId xmlns:a16="http://schemas.microsoft.com/office/drawing/2014/main" id="{B63B7731-0535-2F4C-2514-9DEA258397E7}"/>
               </a:ext>
             </a:extLst>
           </p:cNvPr>
@@ -5173,7 +5176,7 @@
           <p:cNvPr id="4" name="テキスト ボックス 3">
             <a:extLst>
               <a:ext uri="{FF2B5EF4-FFF2-40B4-BE49-F238E27FC236}">
-                <a16:creationId xmlns:a16="http://schemas.microsoft.com/office/drawing/2014/main" id="{9ABE899D-E599-B533-A0D5-FEFCBB908833}"/>
+                <a16:creationId xmlns:a16="http://schemas.microsoft.com/office/drawing/2014/main" id="{A55E801F-8442-D8ED-7811-961B048BDCAD}"/>
               </a:ext>
             </a:extLst>
           </p:cNvPr>
@@ -5197,20 +5200,14 @@
           <a:lstStyle/>
           <a:p>
             <a:r>
-              <a:rPr kumimoji="1" lang="en-US" altLang="ja-JP" sz="2000">
+              <a:rPr kumimoji="1" lang="ja-JP" altLang="en-US" sz="2000">
                 <a:solidFill>
                   <a:srgbClr val="333333"/>
                 </a:solidFill>
                 <a:latin typeface="Arial" panose="020B0604020202020204" pitchFamily="34" charset="0"/>
               </a:rPr>
-              <a:t>Initial gamecard portal: card companies, game titles, community board</a:t>
-            </a:r>
-            <a:endParaRPr kumimoji="1" lang="ja-JP" altLang="en-US" sz="2000">
-              <a:solidFill>
-                <a:srgbClr val="333333"/>
-              </a:solidFill>
-              <a:latin typeface="Arial" panose="020B0604020202020204" pitchFamily="34" charset="0"/>
-            </a:endParaRPr>
+              <a:t>直近のコミットでは、プロジェクトの初期構成と開発基盤が整備されました。</a:t>
+            </a:r>
           </a:p>
         </p:txBody>
       </p:sp>
@@ -5219,7 +5216,7 @@
           <p:cNvPr id="5" name="テキスト ボックス 4">
             <a:extLst>
               <a:ext uri="{FF2B5EF4-FFF2-40B4-BE49-F238E27FC236}">
-                <a16:creationId xmlns:a16="http://schemas.microsoft.com/office/drawing/2014/main" id="{5D5E4246-E6C0-5E53-8F11-5A53C161DFE9}"/>
+                <a16:creationId xmlns:a16="http://schemas.microsoft.com/office/drawing/2014/main" id="{04F04B60-D157-52BD-9CFC-875F3098E0DD}"/>
               </a:ext>
             </a:extLst>
           </p:cNvPr>
@@ -5266,7 +5263,7 @@
             <a:hlinkClick r:id="" action="ppaction://media"/>
             <a:extLst>
               <a:ext uri="{FF2B5EF4-FFF2-40B4-BE49-F238E27FC236}">
-                <a16:creationId xmlns:a16="http://schemas.microsoft.com/office/drawing/2014/main" id="{D21DF73A-B5AE-CEEA-D60E-AA7E402CD767}"/>
+                <a16:creationId xmlns:a16="http://schemas.microsoft.com/office/drawing/2014/main" id="{350AABCB-837B-0BA0-B522-7BCD83D63D5C}"/>
               </a:ext>
             </a:extLst>
           </p:cNvPr>
@@ -5301,7 +5298,7 @@
     </p:spTree>
     <p:extLst>
       <p:ext uri="{BB962C8B-B14F-4D97-AF65-F5344CB8AC3E}">
-        <p14:creationId xmlns:p14="http://schemas.microsoft.com/office/powerpoint/2010/main" val="1395724402"/>
+        <p14:creationId xmlns:p14="http://schemas.microsoft.com/office/powerpoint/2010/main" val="125512840"/>
       </p:ext>
     </p:extLst>
   </p:cSld>
@@ -5310,10 +5307,10 @@
   </p:clrMapOvr>
   <mc:AlternateContent xmlns:mc="http://schemas.openxmlformats.org/markup-compatibility/2006">
     <mc:Choice xmlns:p14="http://schemas.microsoft.com/office/powerpoint/2010/main" Requires="p14">
-      <p:transition spd="slow" p14:dur="2000" advTm="11000"/>
+      <p:transition spd="slow" p14:dur="2000" advTm="7000"/>
     </mc:Choice>
     <mc:Fallback>
-      <p:transition spd="slow" advTm="11000"/>
+      <p:transition spd="slow" advTm="7000"/>
     </mc:Fallback>
   </mc:AlternateContent>
   <p:timing>
@@ -5344,7 +5341,7 @@
                                   <p:childTnLst>
                                     <p:cmd type="call" cmd="playFrom(0.0)">
                                       <p:cBhvr>
-                                        <p:cTn id="6" dur="10420" fill="hold"/>
+                                        <p:cTn id="6" dur="6126" fill="hold"/>
                                         <p:tgtEl>
                                           <p:spTgt spid="6"/>
                                         </p:tgtEl>
@@ -5425,7 +5422,7 @@
           <p:cNvPr id="2" name="テキスト ボックス 1">
             <a:extLst>
               <a:ext uri="{FF2B5EF4-FFF2-40B4-BE49-F238E27FC236}">
-                <a16:creationId xmlns:a16="http://schemas.microsoft.com/office/drawing/2014/main" id="{A22E9594-E9EB-E4C4-F47F-21C7CFC1D577}"/>
+                <a16:creationId xmlns:a16="http://schemas.microsoft.com/office/drawing/2014/main" id="{4F81B87E-248B-1188-DACB-6D7FB0BFE122}"/>
               </a:ext>
             </a:extLst>
           </p:cNvPr>
@@ -5471,7 +5468,7 @@
           <p:cNvPr id="3" name="テキスト ボックス 2">
             <a:extLst>
               <a:ext uri="{FF2B5EF4-FFF2-40B4-BE49-F238E27FC236}">
-                <a16:creationId xmlns:a16="http://schemas.microsoft.com/office/drawing/2014/main" id="{3E430A7D-9C7F-84DE-4A11-73E714A78583}"/>
+                <a16:creationId xmlns:a16="http://schemas.microsoft.com/office/drawing/2014/main" id="{149D7E9F-BD7E-AE5C-B863-01DE0A8295D8}"/>
               </a:ext>
             </a:extLst>
           </p:cNvPr>
@@ -5511,7 +5508,7 @@
           <p:cNvPr id="4" name="テキスト ボックス 3">
             <a:extLst>
               <a:ext uri="{FF2B5EF4-FFF2-40B4-BE49-F238E27FC236}">
-                <a16:creationId xmlns:a16="http://schemas.microsoft.com/office/drawing/2014/main" id="{0CA9772A-82B3-EF89-F31B-DB46DDE669F8}"/>
+                <a16:creationId xmlns:a16="http://schemas.microsoft.com/office/drawing/2014/main" id="{FED22EDD-ECA9-3E34-D63E-CD1F7C7B6B48}"/>
               </a:ext>
             </a:extLst>
           </p:cNvPr>
@@ -5576,7 +5573,7 @@
           <p:cNvPr id="5" name="テキスト ボックス 4">
             <a:extLst>
               <a:ext uri="{FF2B5EF4-FFF2-40B4-BE49-F238E27FC236}">
-                <a16:creationId xmlns:a16="http://schemas.microsoft.com/office/drawing/2014/main" id="{62D0AC5C-FE61-3649-5D24-BA78C2C3FF19}"/>
+                <a16:creationId xmlns:a16="http://schemas.microsoft.com/office/drawing/2014/main" id="{C9BB96EA-7B66-11CB-E69E-75D94C260C56}"/>
               </a:ext>
             </a:extLst>
           </p:cNvPr>
@@ -5623,7 +5620,7 @@
             <a:hlinkClick r:id="" action="ppaction://media"/>
             <a:extLst>
               <a:ext uri="{FF2B5EF4-FFF2-40B4-BE49-F238E27FC236}">
-                <a16:creationId xmlns:a16="http://schemas.microsoft.com/office/drawing/2014/main" id="{A4A6DCFF-937A-A63D-880E-9196BEEE3347}"/>
+                <a16:creationId xmlns:a16="http://schemas.microsoft.com/office/drawing/2014/main" id="{8A480F0F-9421-861B-0D6E-5A1F246A43B8}"/>
               </a:ext>
             </a:extLst>
           </p:cNvPr>
@@ -5658,7 +5655,7 @@
     </p:spTree>
     <p:extLst>
       <p:ext uri="{BB962C8B-B14F-4D97-AF65-F5344CB8AC3E}">
-        <p14:creationId xmlns:p14="http://schemas.microsoft.com/office/powerpoint/2010/main" val="1381773379"/>
+        <p14:creationId xmlns:p14="http://schemas.microsoft.com/office/powerpoint/2010/main" val="4108209203"/>
       </p:ext>
     </p:extLst>
   </p:cSld>
